--- a/Java_Week_7.pptx
+++ b/Java_Week_7.pptx
@@ -1267,7 +1267,7 @@
             </a:extLst>
           </p:cNvPr>
           <p:cNvSpPr>
-            <a:spLocks noRot="1" noChangeAspect="1" noChangeArrowheads="1" noTextEdit="1"/>
+            <a:spLocks noGrp="1" noRot="1" noChangeAspect="1" noChangeArrowheads="1" noTextEdit="1"/>
           </p:cNvSpPr>
           <p:nvPr>
             <p:ph type="sldImg"/>
@@ -1416,7 +1416,7 @@
             </a:extLst>
           </p:cNvPr>
           <p:cNvSpPr>
-            <a:spLocks noRot="1" noChangeAspect="1" noChangeArrowheads="1" noTextEdit="1"/>
+            <a:spLocks noGrp="1" noRot="1" noChangeAspect="1" noChangeArrowheads="1" noTextEdit="1"/>
           </p:cNvSpPr>
           <p:nvPr>
             <p:ph type="sldImg"/>
@@ -3331,7 +3331,7 @@
             </a:extLst>
           </p:cNvPr>
           <p:cNvSpPr>
-            <a:spLocks noRot="1" noChangeAspect="1" noChangeArrowheads="1" noTextEdit="1"/>
+            <a:spLocks noGrp="1" noRot="1" noChangeAspect="1" noChangeArrowheads="1" noTextEdit="1"/>
           </p:cNvSpPr>
           <p:nvPr>
             <p:ph type="sldImg"/>
@@ -3560,7 +3560,7 @@
             </a:extLst>
           </p:cNvPr>
           <p:cNvSpPr>
-            <a:spLocks noRot="1" noChangeAspect="1" noChangeArrowheads="1" noTextEdit="1"/>
+            <a:spLocks noGrp="1" noRot="1" noChangeAspect="1" noChangeArrowheads="1" noTextEdit="1"/>
           </p:cNvSpPr>
           <p:nvPr>
             <p:ph type="sldImg"/>
@@ -3769,7 +3769,7 @@
             </a:extLst>
           </p:cNvPr>
           <p:cNvSpPr>
-            <a:spLocks noRot="1" noChangeAspect="1" noChangeArrowheads="1" noTextEdit="1"/>
+            <a:spLocks noGrp="1" noRot="1" noChangeAspect="1" noChangeArrowheads="1" noTextEdit="1"/>
           </p:cNvSpPr>
           <p:nvPr>
             <p:ph type="sldImg"/>
@@ -4295,7 +4295,7 @@
             </a:extLst>
           </p:cNvPr>
           <p:cNvSpPr>
-            <a:spLocks noRot="1" noChangeAspect="1" noChangeArrowheads="1" noTextEdit="1"/>
+            <a:spLocks noGrp="1" noRot="1" noChangeAspect="1" noChangeArrowheads="1" noTextEdit="1"/>
           </p:cNvSpPr>
           <p:nvPr>
             <p:ph type="sldImg"/>
@@ -6259,7 +6259,7 @@
             </a:extLst>
           </p:cNvPr>
           <p:cNvSpPr>
-            <a:spLocks noRot="1" noChangeAspect="1" noChangeArrowheads="1" noTextEdit="1"/>
+            <a:spLocks noGrp="1" noRot="1" noChangeAspect="1" noChangeArrowheads="1" noTextEdit="1"/>
           </p:cNvSpPr>
           <p:nvPr>
             <p:ph type="sldImg"/>
@@ -7837,7 +7837,7 @@
             </a:extLst>
           </p:cNvPr>
           <p:cNvSpPr>
-            <a:spLocks noRot="1" noChangeAspect="1" noChangeArrowheads="1" noTextEdit="1"/>
+            <a:spLocks noGrp="1" noRot="1" noChangeAspect="1" noChangeArrowheads="1" noTextEdit="1"/>
           </p:cNvSpPr>
           <p:nvPr>
             <p:ph type="sldImg"/>
@@ -8513,7 +8513,7 @@
             </a:extLst>
           </p:cNvPr>
           <p:cNvSpPr>
-            <a:spLocks noRot="1" noChangeAspect="1" noChangeArrowheads="1" noTextEdit="1"/>
+            <a:spLocks noGrp="1" noRot="1" noChangeAspect="1" noChangeArrowheads="1" noTextEdit="1"/>
           </p:cNvSpPr>
           <p:nvPr>
             <p:ph type="sldImg"/>
@@ -8866,7 +8866,7 @@
             </a:extLst>
           </p:cNvPr>
           <p:cNvSpPr>
-            <a:spLocks noRot="1" noChangeAspect="1" noChangeArrowheads="1" noTextEdit="1"/>
+            <a:spLocks noGrp="1" noRot="1" noChangeAspect="1" noChangeArrowheads="1" noTextEdit="1"/>
           </p:cNvSpPr>
           <p:nvPr>
             <p:ph type="sldImg"/>
@@ -9717,7 +9717,7 @@
             </a:extLst>
           </p:cNvPr>
           <p:cNvSpPr>
-            <a:spLocks noRot="1" noChangeAspect="1" noChangeArrowheads="1" noTextEdit="1"/>
+            <a:spLocks noGrp="1" noRot="1" noChangeAspect="1" noChangeArrowheads="1" noTextEdit="1"/>
           </p:cNvSpPr>
           <p:nvPr>
             <p:ph type="sldImg"/>
@@ -10861,7 +10861,7 @@
             </a:extLst>
           </p:cNvPr>
           <p:cNvSpPr>
-            <a:spLocks noRot="1" noChangeAspect="1" noChangeArrowheads="1" noTextEdit="1"/>
+            <a:spLocks noGrp="1" noRot="1" noChangeAspect="1" noChangeArrowheads="1" noTextEdit="1"/>
           </p:cNvSpPr>
           <p:nvPr>
             <p:ph type="sldImg"/>
@@ -13277,7 +13277,7 @@
           <a:p>
             <a:fld id="{A1E4D65A-0EC1-4CBC-8539-F9FD2B92F981}" type="datetimeFigureOut">
               <a:rPr kumimoji="1" lang="ja-JP" altLang="en-US" smtClean="0"/>
-              <a:t>2026/8/17</a:t>
+              <a:t>2026/8/26</a:t>
             </a:fld>
             <a:endParaRPr kumimoji="1" lang="ja-JP" altLang="en-US"/>
           </a:p>
@@ -15640,7 +15640,7 @@
           <a:p>
             <a:fld id="{A1E4D65A-0EC1-4CBC-8539-F9FD2B92F981}" type="datetimeFigureOut">
               <a:rPr kumimoji="1" lang="ja-JP" altLang="en-US" smtClean="0"/>
-              <a:t>2026/8/17</a:t>
+              <a:t>2026/8/26</a:t>
             </a:fld>
             <a:endParaRPr kumimoji="1" lang="ja-JP" altLang="en-US"/>
           </a:p>
@@ -16127,6 +16127,90 @@
       </p:grpSpPr>
       <p:sp>
         <p:nvSpPr>
+          <p:cNvPr id="574527" name="Text Box 63">
+            <a:extLst>
+              <a:ext uri="{FF2B5EF4-FFF2-40B4-BE49-F238E27FC236}">
+                <a16:creationId xmlns:a16="http://schemas.microsoft.com/office/drawing/2014/main" id="{2EC6D31A-F877-AFFB-4392-0BA322F2B1C2}"/>
+              </a:ext>
+            </a:extLst>
+          </p:cNvPr>
+          <p:cNvSpPr txBox="1">
+            <a:spLocks noChangeArrowheads="1"/>
+          </p:cNvSpPr>
+          <p:nvPr/>
+        </p:nvSpPr>
+        <p:spPr bwMode="auto">
+          <a:xfrm>
+            <a:off x="8250238" y="3644289"/>
+            <a:ext cx="665162" cy="422886"/>
+          </a:xfrm>
+          <a:prstGeom prst="rect">
+            <a:avLst/>
+          </a:prstGeom>
+          <a:solidFill>
+            <a:srgbClr val="FFFFFF"/>
+          </a:solidFill>
+          <a:ln w="9525">
+            <a:solidFill>
+              <a:srgbClr val="000000"/>
+            </a:solidFill>
+            <a:miter lim="800000"/>
+            <a:headEnd/>
+            <a:tailEnd/>
+          </a:ln>
+        </p:spPr>
+        <p:txBody>
+          <a:bodyPr lIns="74295" tIns="8890" rIns="74295" bIns="8890"/>
+          <a:lstStyle/>
+          <a:p>
+            <a:endParaRPr lang="en-US" altLang="ja-JP"/>
+          </a:p>
+        </p:txBody>
+      </p:sp>
+      <p:sp>
+        <p:nvSpPr>
+          <p:cNvPr id="574548" name="Text Box 84">
+            <a:extLst>
+              <a:ext uri="{FF2B5EF4-FFF2-40B4-BE49-F238E27FC236}">
+                <a16:creationId xmlns:a16="http://schemas.microsoft.com/office/drawing/2014/main" id="{3236F2EE-7206-0D43-0567-220C7A445DA4}"/>
+              </a:ext>
+            </a:extLst>
+          </p:cNvPr>
+          <p:cNvSpPr txBox="1">
+            <a:spLocks noChangeArrowheads="1"/>
+          </p:cNvSpPr>
+          <p:nvPr/>
+        </p:nvSpPr>
+        <p:spPr bwMode="auto">
+          <a:xfrm>
+            <a:off x="584994" y="3284538"/>
+            <a:ext cx="861219" cy="238810"/>
+          </a:xfrm>
+          <a:prstGeom prst="rect">
+            <a:avLst/>
+          </a:prstGeom>
+          <a:solidFill>
+            <a:srgbClr val="FFFFFF"/>
+          </a:solidFill>
+          <a:ln w="9525">
+            <a:solidFill>
+              <a:srgbClr val="000000"/>
+            </a:solidFill>
+            <a:miter lim="800000"/>
+            <a:headEnd/>
+            <a:tailEnd/>
+          </a:ln>
+        </p:spPr>
+        <p:txBody>
+          <a:bodyPr lIns="74295" tIns="8890" rIns="74295" bIns="8890"/>
+          <a:lstStyle/>
+          <a:p>
+            <a:endParaRPr lang="en-US" altLang="ja-JP"/>
+          </a:p>
+        </p:txBody>
+      </p:sp>
+      <p:sp>
+        <p:nvSpPr>
           <p:cNvPr id="2" name="Slide Number Placeholder 4">
             <a:extLst>
               <a:ext uri="{FF2B5EF4-FFF2-40B4-BE49-F238E27FC236}">
@@ -16172,7 +16256,7 @@
         <p:spPr bwMode="auto">
           <a:xfrm>
             <a:off x="8248650" y="3082925"/>
-            <a:ext cx="1216025" cy="742950"/>
+            <a:ext cx="1216025" cy="908050"/>
           </a:xfrm>
           <a:prstGeom prst="rect">
             <a:avLst/>
@@ -16217,18 +16301,18 @@
           <a:p>
             <a:pPr algn="just"/>
             <a:r>
-              <a:rPr lang="en-US" altLang="ja-JP" sz="1800"/>
+              <a:rPr lang="en-US" altLang="ja-JP" sz="1800" dirty="0"/>
               <a:t>Employee</a:t>
             </a:r>
           </a:p>
           <a:p>
             <a:pPr algn="just"/>
             <a:r>
-              <a:rPr lang="ja-JP" altLang="en-US" sz="1800"/>
+              <a:rPr lang="ja-JP" altLang="en-US" sz="1800" dirty="0"/>
               <a:t>　　　</a:t>
             </a:r>
             <a:r>
-              <a:rPr lang="en-US" altLang="ja-JP" sz="1800"/>
+              <a:rPr lang="en-US" altLang="ja-JP" sz="1800" dirty="0"/>
               <a:t>emp</a:t>
             </a:r>
           </a:p>
@@ -16250,7 +16334,12 @@
             <p:ph type="title"/>
           </p:nvPr>
         </p:nvSpPr>
-        <p:spPr/>
+        <p:spPr>
+          <a:xfrm>
+            <a:off x="334962" y="281781"/>
+            <a:ext cx="9217025" cy="490537"/>
+          </a:xfrm>
+        </p:spPr>
         <p:txBody>
           <a:bodyPr>
             <a:normAutofit fontScale="90000"/>
@@ -16258,25 +16347,53 @@
           <a:lstStyle/>
           <a:p>
             <a:r>
-              <a:rPr lang="en-US" altLang="ja-JP">
+              <a:rPr lang="en-US" altLang="ja-JP" dirty="0">
                 <a:latin typeface="Arial" panose="020B0604020202020204" pitchFamily="34" charset="0"/>
                 <a:ea typeface="MS UI Gothic" panose="020B0600070205080204" pitchFamily="50" charset="-128"/>
               </a:rPr>
-              <a:t>4.2</a:t>
-            </a:r>
-            <a:r>
-              <a:rPr lang="ja-JP" altLang="en-US">
+              <a:t>Cast </a:t>
+            </a:r>
+            <a:r>
+              <a:rPr lang="en-US" altLang="ja-JP" dirty="0" err="1">
                 <a:latin typeface="Arial" panose="020B0604020202020204" pitchFamily="34" charset="0"/>
                 <a:ea typeface="MS UI Gothic" panose="020B0600070205080204" pitchFamily="50" charset="-128"/>
               </a:rPr>
-              <a:t>　</a:t>
-            </a:r>
-            <a:r>
-              <a:rPr lang="en-US" altLang="ja-JP">
+              <a:t>kiểu</a:t>
+            </a:r>
+            <a:r>
+              <a:rPr lang="en-US" altLang="ja-JP" dirty="0">
                 <a:latin typeface="Arial" panose="020B0604020202020204" pitchFamily="34" charset="0"/>
                 <a:ea typeface="MS UI Gothic" panose="020B0600070205080204" pitchFamily="50" charset="-128"/>
               </a:rPr>
-              <a:t>Cast kiểu tham chiếu (4)</a:t>
+              <a:t> </a:t>
+            </a:r>
+            <a:r>
+              <a:rPr lang="en-US" altLang="ja-JP" dirty="0" err="1">
+                <a:latin typeface="Arial" panose="020B0604020202020204" pitchFamily="34" charset="0"/>
+                <a:ea typeface="MS UI Gothic" panose="020B0600070205080204" pitchFamily="50" charset="-128"/>
+              </a:rPr>
+              <a:t>tham</a:t>
+            </a:r>
+            <a:r>
+              <a:rPr lang="en-US" altLang="ja-JP" dirty="0">
+                <a:latin typeface="Arial" panose="020B0604020202020204" pitchFamily="34" charset="0"/>
+                <a:ea typeface="MS UI Gothic" panose="020B0600070205080204" pitchFamily="50" charset="-128"/>
+              </a:rPr>
+              <a:t> </a:t>
+            </a:r>
+            <a:r>
+              <a:rPr lang="en-US" altLang="ja-JP" dirty="0" err="1">
+                <a:latin typeface="Arial" panose="020B0604020202020204" pitchFamily="34" charset="0"/>
+                <a:ea typeface="MS UI Gothic" panose="020B0600070205080204" pitchFamily="50" charset="-128"/>
+              </a:rPr>
+              <a:t>chiếu</a:t>
+            </a:r>
+            <a:r>
+              <a:rPr lang="en-US" altLang="ja-JP" dirty="0">
+                <a:latin typeface="Arial" panose="020B0604020202020204" pitchFamily="34" charset="0"/>
+                <a:ea typeface="MS UI Gothic" panose="020B0600070205080204" pitchFamily="50" charset="-128"/>
+              </a:rPr>
+              <a:t> (4)</a:t>
             </a:r>
           </a:p>
         </p:txBody>
@@ -16572,11 +16689,123 @@
           <a:lstStyle/>
           <a:p>
             <a:r>
-              <a:rPr lang="en-US" altLang="ja-JP" sz="1800"/>
-              <a:t>Chỉ có thể access vào những tính chất đã kế thừa từ super class</a:t>
-            </a:r>
-            <a:r>
-              <a:rPr lang="ja-JP" altLang="en-US" sz="1800"/>
+              <a:rPr lang="en-US" altLang="ja-JP" sz="1800" dirty="0">
+                <a:latin typeface="+mj-lt"/>
+              </a:rPr>
+              <a:t>Chỉ có </a:t>
+            </a:r>
+            <a:r>
+              <a:rPr lang="en-US" altLang="ja-JP" sz="1800" dirty="0" err="1">
+                <a:latin typeface="+mj-lt"/>
+              </a:rPr>
+              <a:t>thê</a:t>
+            </a:r>
+            <a:r>
+              <a:rPr lang="en-US" altLang="ja-JP" sz="1800" dirty="0">
+                <a:latin typeface="+mj-lt"/>
+              </a:rPr>
+              <a:t>̉ access </a:t>
+            </a:r>
+            <a:r>
+              <a:rPr lang="en-US" altLang="ja-JP" sz="1800" dirty="0" err="1">
+                <a:latin typeface="+mj-lt"/>
+              </a:rPr>
+              <a:t>vào</a:t>
+            </a:r>
+            <a:r>
+              <a:rPr lang="en-US" altLang="ja-JP" sz="1800" dirty="0">
+                <a:latin typeface="+mj-lt"/>
+              </a:rPr>
+              <a:t> </a:t>
+            </a:r>
+            <a:r>
+              <a:rPr lang="en-US" altLang="ja-JP" sz="1800" dirty="0" err="1">
+                <a:latin typeface="+mj-lt"/>
+              </a:rPr>
+              <a:t>những</a:t>
+            </a:r>
+            <a:r>
+              <a:rPr lang="en-US" altLang="ja-JP" sz="1800" dirty="0">
+                <a:latin typeface="+mj-lt"/>
+              </a:rPr>
+              <a:t> </a:t>
+            </a:r>
+            <a:r>
+              <a:rPr lang="en-US" altLang="ja-JP" sz="1800" dirty="0" err="1">
+                <a:latin typeface="+mj-lt"/>
+              </a:rPr>
+              <a:t>tính</a:t>
+            </a:r>
+            <a:r>
+              <a:rPr lang="en-US" altLang="ja-JP" sz="1800" dirty="0">
+                <a:latin typeface="+mj-lt"/>
+              </a:rPr>
+              <a:t> </a:t>
+            </a:r>
+            <a:r>
+              <a:rPr lang="en-US" altLang="ja-JP" sz="1800" dirty="0" err="1">
+                <a:latin typeface="+mj-lt"/>
+              </a:rPr>
+              <a:t>chất</a:t>
+            </a:r>
+            <a:r>
+              <a:rPr lang="en-US" altLang="ja-JP" sz="1800" dirty="0">
+                <a:latin typeface="+mj-lt"/>
+              </a:rPr>
+              <a:t> </a:t>
+            </a:r>
+            <a:r>
+              <a:rPr lang="en-US" altLang="ja-JP" sz="1800" dirty="0" err="1">
+                <a:latin typeface="+mj-lt"/>
+              </a:rPr>
+              <a:t>đa</a:t>
+            </a:r>
+            <a:r>
+              <a:rPr lang="en-US" altLang="ja-JP" sz="1800" dirty="0">
+                <a:latin typeface="+mj-lt"/>
+              </a:rPr>
+              <a:t>̃ </a:t>
+            </a:r>
+            <a:r>
+              <a:rPr lang="en-US" altLang="ja-JP" sz="1800" dirty="0" err="1">
+                <a:latin typeface="+mj-lt"/>
+              </a:rPr>
+              <a:t>kê</a:t>
+            </a:r>
+            <a:r>
+              <a:rPr lang="en-US" altLang="ja-JP" sz="1800" dirty="0">
+                <a:latin typeface="+mj-lt"/>
+              </a:rPr>
+              <a:t>́ </a:t>
+            </a:r>
+            <a:r>
+              <a:rPr lang="en-US" altLang="ja-JP" sz="1800" dirty="0" err="1">
+                <a:latin typeface="+mj-lt"/>
+              </a:rPr>
+              <a:t>thừa</a:t>
+            </a:r>
+            <a:r>
+              <a:rPr lang="en-US" altLang="ja-JP" sz="1800" dirty="0">
+                <a:latin typeface="+mj-lt"/>
+              </a:rPr>
+              <a:t> </a:t>
+            </a:r>
+            <a:r>
+              <a:rPr lang="en-US" altLang="ja-JP" sz="1800" dirty="0" err="1">
+                <a:latin typeface="+mj-lt"/>
+              </a:rPr>
+              <a:t>tư</a:t>
+            </a:r>
+            <a:r>
+              <a:rPr lang="en-US" altLang="ja-JP" sz="1800" dirty="0">
+                <a:latin typeface="+mj-lt"/>
+              </a:rPr>
+              <a:t>̀ super class</a:t>
+            </a:r>
+            <a:r>
+              <a:rPr lang="ja-JP" altLang="en-US" sz="1800" dirty="0">
+                <a:latin typeface="+mj-lt"/>
+              </a:rPr>
               <a:t>！</a:t>
             </a:r>
           </a:p>
@@ -16745,18 +16974,18 @@
           <a:p>
             <a:pPr algn="just"/>
             <a:r>
-              <a:rPr lang="en-US" altLang="ja-JP" sz="1800"/>
+              <a:rPr lang="en-US" altLang="ja-JP" sz="1800" dirty="0"/>
               <a:t>Sales</a:t>
             </a:r>
           </a:p>
           <a:p>
             <a:pPr algn="just"/>
             <a:r>
-              <a:rPr lang="ja-JP" altLang="en-US" sz="1800"/>
+              <a:rPr lang="ja-JP" altLang="en-US" sz="1800" dirty="0"/>
               <a:t>ｓａ</a:t>
             </a:r>
             <a:r>
-              <a:rPr lang="en-US" altLang="ja-JP" sz="1800"/>
+              <a:rPr lang="en-US" altLang="ja-JP" sz="1800" dirty="0"/>
               <a:t>2</a:t>
             </a:r>
           </a:p>
@@ -16823,48 +17052,6 @@
       </p:sp>
       <p:sp>
         <p:nvSpPr>
-          <p:cNvPr id="574527" name="Text Box 63">
-            <a:extLst>
-              <a:ext uri="{FF2B5EF4-FFF2-40B4-BE49-F238E27FC236}">
-                <a16:creationId xmlns:a16="http://schemas.microsoft.com/office/drawing/2014/main" id="{2EC6D31A-F877-AFFB-4392-0BA322F2B1C2}"/>
-              </a:ext>
-            </a:extLst>
-          </p:cNvPr>
-          <p:cNvSpPr txBox="1">
-            <a:spLocks noChangeArrowheads="1"/>
-          </p:cNvSpPr>
-          <p:nvPr/>
-        </p:nvSpPr>
-        <p:spPr bwMode="auto">
-          <a:xfrm>
-            <a:off x="8250238" y="3454400"/>
-            <a:ext cx="347662" cy="169863"/>
-          </a:xfrm>
-          <a:prstGeom prst="rect">
-            <a:avLst/>
-          </a:prstGeom>
-          <a:solidFill>
-            <a:srgbClr val="FFFFFF"/>
-          </a:solidFill>
-          <a:ln w="9525">
-            <a:solidFill>
-              <a:srgbClr val="000000"/>
-            </a:solidFill>
-            <a:miter lim="800000"/>
-            <a:headEnd/>
-            <a:tailEnd/>
-          </a:ln>
-        </p:spPr>
-        <p:txBody>
-          <a:bodyPr lIns="74295" tIns="8890" rIns="74295" bIns="8890"/>
-          <a:lstStyle/>
-          <a:p>
-            <a:endParaRPr lang="en-US" altLang="ja-JP"/>
-          </a:p>
-        </p:txBody>
-      </p:sp>
-      <p:sp>
-        <p:nvSpPr>
           <p:cNvPr id="574529" name="Cloud">
             <a:extLst>
               <a:ext uri="{FF2B5EF4-FFF2-40B4-BE49-F238E27FC236}">
@@ -16879,7 +17066,7 @@
         </p:nvSpPr>
         <p:spPr bwMode="auto">
           <a:xfrm>
-            <a:off x="2967038" y="2536825"/>
+            <a:off x="2996604" y="2516188"/>
             <a:ext cx="3771900" cy="3354388"/>
           </a:xfrm>
           <a:custGeom>
@@ -17239,10 +17426,10 @@
         </p:nvGrpSpPr>
         <p:grpSpPr bwMode="auto">
           <a:xfrm>
-            <a:off x="3652838" y="4062413"/>
-            <a:ext cx="2581275" cy="1168400"/>
-            <a:chOff x="2301" y="2559"/>
-            <a:chExt cx="1626" cy="736"/>
+            <a:off x="2564589" y="4251739"/>
+            <a:ext cx="4445811" cy="1550574"/>
+            <a:chOff x="1935" y="2409"/>
+            <a:chExt cx="2110" cy="551"/>
           </a:xfrm>
         </p:grpSpPr>
         <p:sp>
@@ -17261,8 +17448,8 @@
           </p:nvSpPr>
           <p:spPr bwMode="auto">
             <a:xfrm>
-              <a:off x="2301" y="2559"/>
-              <a:ext cx="1626" cy="736"/>
+              <a:off x="1935" y="2409"/>
+              <a:ext cx="2110" cy="551"/>
             </a:xfrm>
             <a:prstGeom prst="rect">
               <a:avLst/>
@@ -17301,34 +17488,35 @@
                 </a:lnSpc>
               </a:pPr>
               <a:r>
-                <a:rPr lang="en-US" altLang="ja-JP" b="0"/>
-                <a:t>Thuộc tính</a:t>
+                <a:rPr lang="en-US" altLang="ja-JP" b="0" dirty="0" err="1"/>
+                <a:t>Thuộc</a:t>
               </a:r>
               <a:r>
-                <a:rPr lang="en-US" altLang="ja-JP"/>
+                <a:rPr lang="en-US" altLang="ja-JP" b="0" dirty="0"/>
                 <a:t> </a:t>
               </a:r>
               <a:r>
-                <a:rPr lang="ja-JP" altLang="en-US" b="0"/>
+                <a:rPr lang="en-US" altLang="ja-JP" b="0" dirty="0" err="1"/>
+                <a:t>tính</a:t>
+              </a:r>
+              <a:r>
+                <a:rPr lang="en-US" altLang="ja-JP" dirty="0"/>
+                <a:t> </a:t>
+              </a:r>
+              <a:r>
+                <a:rPr lang="ja-JP" altLang="en-US" b="0" dirty="0"/>
                 <a:t>：</a:t>
               </a:r>
             </a:p>
             <a:p>
               <a:pPr algn="just"/>
               <a:r>
-                <a:rPr lang="en-US" altLang="ja-JP" b="0">
+                <a:rPr lang="en-US" altLang="ja-JP" b="0" dirty="0" err="1">
                   <a:ea typeface="ＭＳ ゴシック" panose="020B0609070205080204" pitchFamily="49" charset="-128"/>
                 </a:rPr>
                 <a:t>customerCount</a:t>
               </a:r>
-            </a:p>
-            <a:p>
-              <a:pPr algn="just">
-                <a:lnSpc>
-                  <a:spcPct val="96000"/>
-                </a:lnSpc>
-              </a:pPr>
-              <a:endParaRPr lang="en-US" altLang="ja-JP" b="0">
+              <a:endParaRPr lang="en-US" altLang="ja-JP" b="0" dirty="0">
                 <a:ea typeface="ＭＳ ゴシック" panose="020B0609070205080204" pitchFamily="49" charset="-128"/>
               </a:endParaRPr>
             </a:p>
@@ -17339,43 +17527,95 @@
                 </a:lnSpc>
               </a:pPr>
               <a:r>
-                <a:rPr lang="en-US" altLang="ja-JP" b="0"/>
-                <a:t>Thao tác</a:t>
+                <a:rPr lang="en-US" altLang="ja-JP" b="0" dirty="0"/>
+                <a:t>Thao </a:t>
               </a:r>
               <a:r>
-                <a:rPr lang="en-US" altLang="ja-JP"/>
+                <a:rPr lang="en-US" altLang="ja-JP" b="0" dirty="0" err="1"/>
+                <a:t>tác</a:t>
+              </a:r>
+              <a:r>
+                <a:rPr lang="en-US" altLang="ja-JP" dirty="0"/>
                 <a:t> </a:t>
               </a:r>
               <a:r>
-                <a:rPr lang="ja-JP" altLang="en-US" b="0"/>
+                <a:rPr lang="ja-JP" altLang="en-US" b="0" dirty="0"/>
                 <a:t>：</a:t>
               </a:r>
             </a:p>
             <a:p>
               <a:pPr algn="just"/>
               <a:r>
-                <a:rPr lang="en-US" altLang="ja-JP" b="0">
+                <a:rPr lang="en-US" altLang="ja-JP" b="0" dirty="0">
                   <a:ea typeface="ＭＳ ゴシック" panose="020B0609070205080204" pitchFamily="49" charset="-128"/>
                 </a:rPr>
-                <a:t>Sales(id:String, ename:String, cnt:int)</a:t>
+                <a:t>Sales(</a:t>
+              </a:r>
+              <a:r>
+                <a:rPr lang="en-US" altLang="ja-JP" b="0" dirty="0" err="1">
+                  <a:ea typeface="ＭＳ ゴシック" panose="020B0609070205080204" pitchFamily="49" charset="-128"/>
+                </a:rPr>
+                <a:t>id:String</a:t>
+              </a:r>
+              <a:r>
+                <a:rPr lang="en-US" altLang="ja-JP" b="0" dirty="0">
+                  <a:ea typeface="ＭＳ ゴシック" panose="020B0609070205080204" pitchFamily="49" charset="-128"/>
+                </a:rPr>
+                <a:t>, </a:t>
+              </a:r>
+              <a:r>
+                <a:rPr lang="en-US" altLang="ja-JP" b="0" dirty="0" err="1">
+                  <a:ea typeface="ＭＳ ゴシック" panose="020B0609070205080204" pitchFamily="49" charset="-128"/>
+                </a:rPr>
+                <a:t>ename:String</a:t>
+              </a:r>
+              <a:r>
+                <a:rPr lang="en-US" altLang="ja-JP" b="0" dirty="0">
+                  <a:ea typeface="ＭＳ ゴシック" panose="020B0609070205080204" pitchFamily="49" charset="-128"/>
+                </a:rPr>
+                <a:t>, </a:t>
+              </a:r>
+              <a:r>
+                <a:rPr lang="en-US" altLang="ja-JP" b="0" dirty="0" err="1">
+                  <a:ea typeface="ＭＳ ゴシック" panose="020B0609070205080204" pitchFamily="49" charset="-128"/>
+                </a:rPr>
+                <a:t>cnt:int</a:t>
+              </a:r>
+              <a:r>
+                <a:rPr lang="en-US" altLang="ja-JP" b="0" dirty="0">
+                  <a:ea typeface="ＭＳ ゴシック" panose="020B0609070205080204" pitchFamily="49" charset="-128"/>
+                </a:rPr>
+                <a:t>)</a:t>
               </a:r>
             </a:p>
             <a:p>
               <a:pPr algn="just"/>
               <a:r>
-                <a:rPr lang="en-US" altLang="ja-JP" b="0">
+                <a:rPr lang="en-US" altLang="ja-JP" b="0" dirty="0" err="1">
                   <a:ea typeface="ＭＳ ゴシック" panose="020B0609070205080204" pitchFamily="49" charset="-128"/>
                 </a:rPr>
-                <a:t>addCount():void</a:t>
+                <a:t>addCount</a:t>
+              </a:r>
+              <a:r>
+                <a:rPr lang="en-US" altLang="ja-JP" b="0" dirty="0">
+                  <a:ea typeface="ＭＳ ゴシック" panose="020B0609070205080204" pitchFamily="49" charset="-128"/>
+                </a:rPr>
+                <a:t>():void</a:t>
               </a:r>
             </a:p>
             <a:p>
               <a:pPr algn="just"/>
               <a:r>
-                <a:rPr lang="en-US" altLang="ja-JP" b="0">
+                <a:rPr lang="en-US" altLang="ja-JP" b="0" dirty="0" err="1">
                   <a:ea typeface="ＭＳ ゴシック" panose="020B0609070205080204" pitchFamily="49" charset="-128"/>
                 </a:rPr>
-                <a:t>getCount():int</a:t>
+                <a:t>getCount</a:t>
+              </a:r>
+              <a:r>
+                <a:rPr lang="en-US" altLang="ja-JP" b="0" dirty="0">
+                  <a:ea typeface="ＭＳ ゴシック" panose="020B0609070205080204" pitchFamily="49" charset="-128"/>
+                </a:rPr>
+                <a:t>():int</a:t>
               </a:r>
             </a:p>
           </p:txBody>
@@ -17453,7 +17693,7 @@
           </p:nvSpPr>
           <p:spPr bwMode="auto">
             <a:xfrm>
-              <a:off x="3182" y="2664"/>
+              <a:off x="2784" y="2534"/>
               <a:ext cx="286" cy="125"/>
             </a:xfrm>
             <a:prstGeom prst="rect">
@@ -17512,10 +17752,10 @@
         </p:nvGrpSpPr>
         <p:grpSpPr bwMode="auto">
           <a:xfrm>
-            <a:off x="3652838" y="2919413"/>
-            <a:ext cx="1633537" cy="1055687"/>
-            <a:chOff x="2301" y="1839"/>
-            <a:chExt cx="1029" cy="665"/>
+            <a:off x="2232692" y="2899203"/>
+            <a:ext cx="2951659" cy="1328123"/>
+            <a:chOff x="1808" y="1890"/>
+            <a:chExt cx="1540" cy="549"/>
           </a:xfrm>
         </p:grpSpPr>
         <p:sp>
@@ -17534,8 +17774,8 @@
           </p:nvSpPr>
           <p:spPr bwMode="auto">
             <a:xfrm>
-              <a:off x="2301" y="1839"/>
-              <a:ext cx="1029" cy="665"/>
+              <a:off x="1808" y="1890"/>
+              <a:ext cx="1540" cy="549"/>
             </a:xfrm>
             <a:prstGeom prst="rect">
               <a:avLst/>
@@ -17574,31 +17814,45 @@
                 </a:lnSpc>
               </a:pPr>
               <a:r>
-                <a:rPr lang="en-US" altLang="ja-JP" b="0"/>
-                <a:t>Thuộc tính</a:t>
+                <a:rPr lang="en-US" altLang="ja-JP" b="0" dirty="0" err="1"/>
+                <a:t>Thuộc</a:t>
               </a:r>
               <a:r>
-                <a:rPr lang="ja-JP" altLang="en-US" b="0"/>
+                <a:rPr lang="en-US" altLang="ja-JP" b="0" dirty="0"/>
+                <a:t> </a:t>
+              </a:r>
+              <a:r>
+                <a:rPr lang="en-US" altLang="ja-JP" b="0" dirty="0" err="1"/>
+                <a:t>tính</a:t>
+              </a:r>
+              <a:r>
+                <a:rPr lang="ja-JP" altLang="en-US" b="0" dirty="0"/>
                 <a:t>：</a:t>
               </a:r>
             </a:p>
             <a:p>
               <a:pPr algn="just"/>
               <a:r>
-                <a:rPr lang="en-US" altLang="ja-JP" b="0">
+                <a:rPr lang="en-US" altLang="ja-JP" b="0" dirty="0" err="1">
                   <a:ea typeface="ＭＳ ゴシック" panose="020B0609070205080204" pitchFamily="49" charset="-128"/>
                 </a:rPr>
                 <a:t>empId</a:t>
               </a:r>
+              <a:endParaRPr lang="en-US" altLang="ja-JP" b="0" dirty="0">
+                <a:ea typeface="ＭＳ ゴシック" panose="020B0609070205080204" pitchFamily="49" charset="-128"/>
+              </a:endParaRPr>
             </a:p>
             <a:p>
               <a:pPr algn="just"/>
               <a:r>
-                <a:rPr lang="en-US" altLang="ja-JP" b="0">
+                <a:rPr lang="en-US" altLang="ja-JP" b="0" dirty="0" err="1">
                   <a:ea typeface="ＭＳ ゴシック" panose="020B0609070205080204" pitchFamily="49" charset="-128"/>
                 </a:rPr>
                 <a:t>empName</a:t>
               </a:r>
+              <a:endParaRPr lang="en-US" altLang="ja-JP" b="0" dirty="0">
+                <a:ea typeface="ＭＳ ゴシック" panose="020B0609070205080204" pitchFamily="49" charset="-128"/>
+              </a:endParaRPr>
             </a:p>
             <a:p>
               <a:pPr algn="just">
@@ -17606,7 +17860,7 @@
                   <a:spcPct val="96000"/>
                 </a:lnSpc>
               </a:pPr>
-              <a:endParaRPr lang="en-US" altLang="ja-JP" b="0"/>
+              <a:endParaRPr lang="en-US" altLang="ja-JP" b="0" dirty="0"/>
             </a:p>
             <a:p>
               <a:pPr algn="just">
@@ -17615,21 +17869,28 @@
                 </a:lnSpc>
               </a:pPr>
               <a:r>
-                <a:rPr lang="en-US" altLang="ja-JP" b="0"/>
-                <a:t>Thao tác</a:t>
+                <a:rPr lang="en-US" altLang="ja-JP" b="0" dirty="0"/>
+                <a:t>Thao </a:t>
               </a:r>
               <a:r>
-                <a:rPr lang="ja-JP" altLang="en-US" b="0"/>
+                <a:rPr lang="en-US" altLang="ja-JP" b="0" dirty="0" err="1"/>
+                <a:t>tác</a:t>
+              </a:r>
+              <a:r>
+                <a:rPr lang="ja-JP" altLang="en-US" b="0" dirty="0"/>
                 <a:t>：</a:t>
               </a:r>
-            </a:p>
-            <a:p>
-              <a:pPr algn="just"/>
               <a:r>
-                <a:rPr lang="en-US" altLang="ja-JP" b="0">
+                <a:rPr lang="en-US" altLang="ja-JP" b="0" dirty="0" err="1">
                   <a:ea typeface="ＭＳ ゴシック" panose="020B0609070205080204" pitchFamily="49" charset="-128"/>
                 </a:rPr>
-                <a:t>printInfo():void</a:t>
+                <a:t>printInfo</a:t>
+              </a:r>
+              <a:r>
+                <a:rPr lang="en-US" altLang="ja-JP" b="0" dirty="0">
+                  <a:ea typeface="ＭＳ ゴシック" panose="020B0609070205080204" pitchFamily="49" charset="-128"/>
+                </a:rPr>
+                <a:t>():void</a:t>
               </a:r>
             </a:p>
           </p:txBody>
@@ -17650,8 +17911,8 @@
           </p:nvSpPr>
           <p:spPr bwMode="auto">
             <a:xfrm>
-              <a:off x="2803" y="2063"/>
-              <a:ext cx="384" cy="113"/>
+              <a:off x="2482" y="2148"/>
+              <a:ext cx="705" cy="107"/>
             </a:xfrm>
             <a:prstGeom prst="rect">
               <a:avLst/>
@@ -17686,7 +17947,7 @@
             <a:p>
               <a:pPr algn="ctr"/>
               <a:r>
-                <a:rPr lang="ja-JP" altLang="en-US" b="0"/>
+                <a:rPr lang="ja-JP" altLang="en-US" b="0" dirty="0"/>
                 <a:t>田中花子</a:t>
               </a:r>
             </a:p>
@@ -17708,8 +17969,8 @@
           </p:nvSpPr>
           <p:spPr bwMode="auto">
             <a:xfrm>
-              <a:off x="2805" y="1934"/>
-              <a:ext cx="389" cy="119"/>
+              <a:off x="2431" y="2007"/>
+              <a:ext cx="769" cy="116"/>
             </a:xfrm>
             <a:prstGeom prst="rect">
               <a:avLst/>
@@ -17767,7 +18028,7 @@
         </p:nvSpPr>
         <p:spPr bwMode="auto">
           <a:xfrm>
-            <a:off x="3652838" y="3527425"/>
+            <a:off x="2912269" y="3765770"/>
             <a:ext cx="1633537" cy="0"/>
           </a:xfrm>
           <a:prstGeom prst="line">
@@ -17959,8 +18220,76 @@
           <a:p>
             <a:pPr algn="just"/>
             <a:r>
-              <a:rPr lang="en-US" altLang="ja-JP" sz="1800"/>
-              <a:t>Tính chất đã kế thừa từ Employee</a:t>
+              <a:rPr lang="en-US" altLang="ja-JP" sz="1800" dirty="0" err="1">
+                <a:latin typeface="+mj-lt"/>
+              </a:rPr>
+              <a:t>Tính</a:t>
+            </a:r>
+            <a:r>
+              <a:rPr lang="en-US" altLang="ja-JP" sz="1800" dirty="0">
+                <a:latin typeface="+mj-lt"/>
+              </a:rPr>
+              <a:t> </a:t>
+            </a:r>
+            <a:r>
+              <a:rPr lang="en-US" altLang="ja-JP" sz="1800" dirty="0" err="1">
+                <a:latin typeface="+mj-lt"/>
+              </a:rPr>
+              <a:t>chất</a:t>
+            </a:r>
+            <a:r>
+              <a:rPr lang="en-US" altLang="ja-JP" sz="1800" dirty="0">
+                <a:latin typeface="+mj-lt"/>
+              </a:rPr>
+              <a:t> </a:t>
+            </a:r>
+            <a:r>
+              <a:rPr lang="en-US" altLang="ja-JP" sz="1800" dirty="0" err="1">
+                <a:latin typeface="+mj-lt"/>
+              </a:rPr>
+              <a:t>đa</a:t>
+            </a:r>
+            <a:r>
+              <a:rPr lang="en-US" altLang="ja-JP" sz="1800" dirty="0">
+                <a:latin typeface="+mj-lt"/>
+              </a:rPr>
+              <a:t>̃ </a:t>
+            </a:r>
+            <a:r>
+              <a:rPr lang="en-US" altLang="ja-JP" sz="1800" dirty="0" err="1">
+                <a:latin typeface="+mj-lt"/>
+              </a:rPr>
+              <a:t>kê</a:t>
+            </a:r>
+            <a:r>
+              <a:rPr lang="en-US" altLang="ja-JP" sz="1800" dirty="0">
+                <a:latin typeface="+mj-lt"/>
+              </a:rPr>
+              <a:t>́ </a:t>
+            </a:r>
+            <a:r>
+              <a:rPr lang="en-US" altLang="ja-JP" sz="1800" dirty="0" err="1">
+                <a:latin typeface="+mj-lt"/>
+              </a:rPr>
+              <a:t>thừa</a:t>
+            </a:r>
+            <a:r>
+              <a:rPr lang="en-US" altLang="ja-JP" sz="1800" dirty="0">
+                <a:latin typeface="+mj-lt"/>
+              </a:rPr>
+              <a:t> </a:t>
+            </a:r>
+            <a:r>
+              <a:rPr lang="en-US" altLang="ja-JP" sz="1800" dirty="0" err="1">
+                <a:latin typeface="+mj-lt"/>
+              </a:rPr>
+              <a:t>tư</a:t>
+            </a:r>
+            <a:r>
+              <a:rPr lang="en-US" altLang="ja-JP" sz="1800" dirty="0">
+                <a:latin typeface="+mj-lt"/>
+              </a:rPr>
+              <a:t>̀ Employee</a:t>
             </a:r>
           </a:p>
         </p:txBody>
@@ -17981,7 +18310,7 @@
         </p:nvSpPr>
         <p:spPr bwMode="auto">
           <a:xfrm>
-            <a:off x="6408738" y="4675188"/>
+            <a:off x="7473261" y="4278495"/>
             <a:ext cx="2206625" cy="612775"/>
           </a:xfrm>
           <a:prstGeom prst="wedgeRoundRectCallout">
@@ -18009,8 +18338,64 @@
           <a:p>
             <a:pPr algn="just"/>
             <a:r>
-              <a:rPr lang="en-US" altLang="ja-JP" sz="1800"/>
-              <a:t>Tính chất độc lập của Sales</a:t>
+              <a:rPr lang="en-US" altLang="ja-JP" sz="1800" dirty="0" err="1">
+                <a:latin typeface="+mj-lt"/>
+              </a:rPr>
+              <a:t>Tính</a:t>
+            </a:r>
+            <a:r>
+              <a:rPr lang="en-US" altLang="ja-JP" sz="1800" dirty="0">
+                <a:latin typeface="+mj-lt"/>
+              </a:rPr>
+              <a:t> </a:t>
+            </a:r>
+            <a:r>
+              <a:rPr lang="en-US" altLang="ja-JP" sz="1800" dirty="0" err="1">
+                <a:latin typeface="+mj-lt"/>
+              </a:rPr>
+              <a:t>chất</a:t>
+            </a:r>
+            <a:r>
+              <a:rPr lang="en-US" altLang="ja-JP" sz="1800" dirty="0">
+                <a:latin typeface="+mj-lt"/>
+              </a:rPr>
+              <a:t> </a:t>
+            </a:r>
+            <a:r>
+              <a:rPr lang="en-US" altLang="ja-JP" sz="1800" dirty="0" err="1">
+                <a:latin typeface="+mj-lt"/>
+              </a:rPr>
+              <a:t>độc</a:t>
+            </a:r>
+            <a:r>
+              <a:rPr lang="en-US" altLang="ja-JP" sz="1800" dirty="0">
+                <a:latin typeface="+mj-lt"/>
+              </a:rPr>
+              <a:t> </a:t>
+            </a:r>
+            <a:r>
+              <a:rPr lang="en-US" altLang="ja-JP" sz="1800" dirty="0" err="1">
+                <a:latin typeface="+mj-lt"/>
+              </a:rPr>
+              <a:t>lập</a:t>
+            </a:r>
+            <a:r>
+              <a:rPr lang="en-US" altLang="ja-JP" sz="1800" dirty="0">
+                <a:latin typeface="+mj-lt"/>
+              </a:rPr>
+              <a:t> </a:t>
+            </a:r>
+            <a:r>
+              <a:rPr lang="en-US" altLang="ja-JP" sz="1800" dirty="0" err="1">
+                <a:latin typeface="+mj-lt"/>
+              </a:rPr>
+              <a:t>của</a:t>
+            </a:r>
+            <a:r>
+              <a:rPr lang="en-US" altLang="ja-JP" sz="1800" dirty="0">
+                <a:latin typeface="+mj-lt"/>
+              </a:rPr>
+              <a:t> Sales</a:t>
             </a:r>
           </a:p>
         </p:txBody>
@@ -18031,8 +18416,8 @@
         </p:nvSpPr>
         <p:spPr bwMode="auto">
           <a:xfrm>
-            <a:off x="477838" y="1260475"/>
-            <a:ext cx="5014912" cy="1077913"/>
+            <a:off x="152400" y="1260475"/>
+            <a:ext cx="5867400" cy="1077913"/>
           </a:xfrm>
           <a:prstGeom prst="rect">
             <a:avLst/>
@@ -18172,48 +18557,122 @@
           </a:lstStyle>
           <a:p>
             <a:r>
-              <a:rPr lang="en-US" altLang="ja-JP" sz="1800">
+              <a:rPr lang="en-US" altLang="ja-JP" sz="1800" dirty="0">
+                <a:latin typeface="+mj-lt"/>
                 <a:ea typeface="ＭＳ ゴシック" panose="020B0609070205080204" pitchFamily="49" charset="-128"/>
               </a:rPr>
-              <a:t>Sales sa = new Sales();</a:t>
-            </a:r>
-          </a:p>
-          <a:p>
-            <a:r>
-              <a:rPr lang="en-US" altLang="ja-JP" sz="1800">
+              <a:t>Sales </a:t>
+            </a:r>
+            <a:r>
+              <a:rPr lang="en-US" altLang="ja-JP" sz="1800" dirty="0" err="1">
+                <a:latin typeface="+mj-lt"/>
                 <a:ea typeface="ＭＳ ゴシック" panose="020B0609070205080204" pitchFamily="49" charset="-128"/>
               </a:rPr>
-              <a:t>Employee emp = sa;</a:t>
-            </a:r>
-          </a:p>
-          <a:p>
-            <a:r>
-              <a:rPr lang="en-US" altLang="ja-JP" sz="1800">
+              <a:t>sa</a:t>
+            </a:r>
+            <a:r>
+              <a:rPr lang="en-US" altLang="ja-JP" sz="1800" dirty="0">
+                <a:latin typeface="+mj-lt"/>
                 <a:ea typeface="ＭＳ ゴシック" panose="020B0609070205080204" pitchFamily="49" charset="-128"/>
               </a:rPr>
+              <a:t> = new Sales();</a:t>
+            </a:r>
+          </a:p>
+          <a:p>
+            <a:r>
+              <a:rPr lang="en-US" altLang="ja-JP" sz="1800" dirty="0">
+                <a:latin typeface="+mj-lt"/>
+                <a:ea typeface="ＭＳ ゴシック" panose="020B0609070205080204" pitchFamily="49" charset="-128"/>
+              </a:rPr>
+              <a:t>Employee emp = </a:t>
+            </a:r>
+            <a:r>
+              <a:rPr lang="en-US" altLang="ja-JP" sz="1800" dirty="0" err="1">
+                <a:latin typeface="+mj-lt"/>
+                <a:ea typeface="ＭＳ ゴシック" panose="020B0609070205080204" pitchFamily="49" charset="-128"/>
+              </a:rPr>
+              <a:t>sa</a:t>
+            </a:r>
+            <a:r>
+              <a:rPr lang="en-US" altLang="ja-JP" sz="1800" dirty="0">
+                <a:latin typeface="+mj-lt"/>
+                <a:ea typeface="ＭＳ ゴシック" panose="020B0609070205080204" pitchFamily="49" charset="-128"/>
+              </a:rPr>
+              <a:t>;</a:t>
+            </a:r>
+          </a:p>
+          <a:p>
+            <a:r>
+              <a:rPr lang="en-US" altLang="ja-JP" sz="1800" dirty="0">
+                <a:latin typeface="+mj-lt"/>
+                <a:ea typeface="ＭＳ ゴシック" panose="020B0609070205080204" pitchFamily="49" charset="-128"/>
+              </a:rPr>
               <a:t>Sales sa2 = (Sales)emp;</a:t>
             </a:r>
             <a:r>
-              <a:rPr lang="ja-JP" altLang="en-US" sz="1800">
+              <a:rPr lang="ja-JP" altLang="en-US" sz="1800" dirty="0">
+                <a:latin typeface="+mj-lt"/>
                 <a:ea typeface="ＭＳ ゴシック" panose="020B0609070205080204" pitchFamily="49" charset="-128"/>
               </a:rPr>
               <a:t>　</a:t>
             </a:r>
             <a:r>
-              <a:rPr lang="en-US" altLang="ja-JP" sz="1800">
+              <a:rPr lang="en-US" altLang="ja-JP" sz="1800" dirty="0">
+                <a:latin typeface="+mj-lt"/>
                 <a:ea typeface="ＭＳ ゴシック" panose="020B0609070205080204" pitchFamily="49" charset="-128"/>
               </a:rPr>
               <a:t>//</a:t>
             </a:r>
             <a:r>
-              <a:rPr lang="en-US" altLang="ja-JP" sz="1800">
+              <a:rPr lang="en-US" altLang="ja-JP" sz="1800" dirty="0">
+                <a:latin typeface="+mj-lt"/>
                 <a:ea typeface="MS UI Gothic" panose="020B0600070205080204" pitchFamily="50" charset="-128"/>
               </a:rPr>
-              <a:t> không thể convert ngầm</a:t>
-            </a:r>
-          </a:p>
-          <a:p>
-            <a:endParaRPr lang="en-US" altLang="ja-JP" sz="1800">
+              <a:t> </a:t>
+            </a:r>
+            <a:r>
+              <a:rPr lang="en-US" altLang="ja-JP" sz="1800" dirty="0" err="1">
+                <a:latin typeface="+mj-lt"/>
+                <a:ea typeface="MS UI Gothic" panose="020B0600070205080204" pitchFamily="50" charset="-128"/>
+              </a:rPr>
+              <a:t>không</a:t>
+            </a:r>
+            <a:r>
+              <a:rPr lang="en-US" altLang="ja-JP" sz="1800" dirty="0">
+                <a:latin typeface="+mj-lt"/>
+                <a:ea typeface="MS UI Gothic" panose="020B0600070205080204" pitchFamily="50" charset="-128"/>
+              </a:rPr>
+              <a:t> </a:t>
+            </a:r>
+            <a:r>
+              <a:rPr lang="en-US" altLang="ja-JP" sz="1800" dirty="0" err="1">
+                <a:latin typeface="+mj-lt"/>
+                <a:ea typeface="MS UI Gothic" panose="020B0600070205080204" pitchFamily="50" charset="-128"/>
+              </a:rPr>
+              <a:t>thê</a:t>
+            </a:r>
+            <a:r>
+              <a:rPr lang="en-US" altLang="ja-JP" sz="1800" dirty="0">
+                <a:latin typeface="+mj-lt"/>
+                <a:ea typeface="MS UI Gothic" panose="020B0600070205080204" pitchFamily="50" charset="-128"/>
+              </a:rPr>
+              <a:t>̉ convert </a:t>
+            </a:r>
+            <a:r>
+              <a:rPr lang="en-US" altLang="ja-JP" sz="1800" dirty="0" err="1">
+                <a:latin typeface="+mj-lt"/>
+                <a:ea typeface="MS UI Gothic" panose="020B0600070205080204" pitchFamily="50" charset="-128"/>
+              </a:rPr>
+              <a:t>ngầm</a:t>
+            </a:r>
+            <a:endParaRPr lang="en-US" altLang="ja-JP" sz="1800" dirty="0">
+              <a:latin typeface="+mj-lt"/>
+              <a:ea typeface="MS UI Gothic" panose="020B0600070205080204" pitchFamily="50" charset="-128"/>
+            </a:endParaRPr>
+          </a:p>
+          <a:p>
+            <a:endParaRPr lang="en-US" altLang="ja-JP" sz="1800" dirty="0">
+              <a:latin typeface="+mj-lt"/>
               <a:ea typeface="MS UI Gothic" panose="020B0600070205080204" pitchFamily="50" charset="-128"/>
             </a:endParaRPr>
           </a:p>
@@ -18291,48 +18750,6 @@
               <a:rPr lang="ja-JP" altLang="en-US" sz="1800"/>
               <a:t>ｓａ</a:t>
             </a:r>
-          </a:p>
-        </p:txBody>
-      </p:sp>
-      <p:sp>
-        <p:nvSpPr>
-          <p:cNvPr id="574548" name="Text Box 84">
-            <a:extLst>
-              <a:ext uri="{FF2B5EF4-FFF2-40B4-BE49-F238E27FC236}">
-                <a16:creationId xmlns:a16="http://schemas.microsoft.com/office/drawing/2014/main" id="{3236F2EE-7206-0D43-0567-220C7A445DA4}"/>
-              </a:ext>
-            </a:extLst>
-          </p:cNvPr>
-          <p:cNvSpPr txBox="1">
-            <a:spLocks noChangeArrowheads="1"/>
-          </p:cNvSpPr>
-          <p:nvPr/>
-        </p:nvSpPr>
-        <p:spPr bwMode="auto">
-          <a:xfrm>
-            <a:off x="1098550" y="3284538"/>
-            <a:ext cx="347663" cy="169862"/>
-          </a:xfrm>
-          <a:prstGeom prst="rect">
-            <a:avLst/>
-          </a:prstGeom>
-          <a:solidFill>
-            <a:srgbClr val="FFFFFF"/>
-          </a:solidFill>
-          <a:ln w="9525">
-            <a:solidFill>
-              <a:srgbClr val="000000"/>
-            </a:solidFill>
-            <a:miter lim="800000"/>
-            <a:headEnd/>
-            <a:tailEnd/>
-          </a:ln>
-        </p:spPr>
-        <p:txBody>
-          <a:bodyPr lIns="74295" tIns="8890" rIns="74295" bIns="8890"/>
-          <a:lstStyle/>
-          <a:p>
-            <a:endParaRPr lang="en-US" altLang="ja-JP"/>
           </a:p>
         </p:txBody>
       </p:sp>
@@ -18651,13 +19068,13 @@
         </p:nvSpPr>
         <p:spPr bwMode="auto">
           <a:xfrm>
-            <a:off x="628650" y="5792788"/>
-            <a:ext cx="7834313" cy="838200"/>
+            <a:off x="628650" y="5971564"/>
+            <a:ext cx="9051236" cy="553244"/>
           </a:xfrm>
           <a:prstGeom prst="wedgeRoundRectCallout">
             <a:avLst>
-              <a:gd name="adj1" fmla="val -33120"/>
-              <a:gd name="adj2" fmla="val -94130"/>
+              <a:gd name="adj1" fmla="val -14515"/>
+              <a:gd name="adj2" fmla="val -72163"/>
               <a:gd name="adj3" fmla="val 16667"/>
             </a:avLst>
           </a:prstGeom>
@@ -18690,29 +19107,297 @@
           <a:lstStyle/>
           <a:p>
             <a:r>
-              <a:rPr lang="en-US" altLang="ja-JP" sz="1500"/>
-              <a:t>Do đang có những thứ cần thiết cho object của Sales class nên nếu là convert rõ ràng thì có thể thực hiện</a:t>
-            </a:r>
-            <a:r>
-              <a:rPr lang="ja-JP" altLang="en-US" sz="1500"/>
+              <a:rPr lang="en-US" altLang="ja-JP" sz="1500" dirty="0">
+                <a:latin typeface="+mj-lt"/>
+              </a:rPr>
+              <a:t>Do </a:t>
+            </a:r>
+            <a:r>
+              <a:rPr lang="en-US" altLang="ja-JP" sz="1500" dirty="0" err="1">
+                <a:latin typeface="+mj-lt"/>
+              </a:rPr>
+              <a:t>đang</a:t>
+            </a:r>
+            <a:r>
+              <a:rPr lang="en-US" altLang="ja-JP" sz="1500" dirty="0">
+                <a:latin typeface="+mj-lt"/>
+              </a:rPr>
+              <a:t> có </a:t>
+            </a:r>
+            <a:r>
+              <a:rPr lang="en-US" altLang="ja-JP" sz="1500" dirty="0" err="1">
+                <a:latin typeface="+mj-lt"/>
+              </a:rPr>
+              <a:t>những</a:t>
+            </a:r>
+            <a:r>
+              <a:rPr lang="en-US" altLang="ja-JP" sz="1500" dirty="0">
+                <a:latin typeface="+mj-lt"/>
+              </a:rPr>
+              <a:t> </a:t>
+            </a:r>
+            <a:r>
+              <a:rPr lang="en-US" altLang="ja-JP" sz="1500" dirty="0" err="1">
+                <a:latin typeface="+mj-lt"/>
+              </a:rPr>
+              <a:t>thứ</a:t>
+            </a:r>
+            <a:r>
+              <a:rPr lang="en-US" altLang="ja-JP" sz="1500" dirty="0">
+                <a:latin typeface="+mj-lt"/>
+              </a:rPr>
+              <a:t> </a:t>
+            </a:r>
+            <a:r>
+              <a:rPr lang="en-US" altLang="ja-JP" sz="1500" dirty="0" err="1">
+                <a:latin typeface="+mj-lt"/>
+              </a:rPr>
+              <a:t>cần</a:t>
+            </a:r>
+            <a:r>
+              <a:rPr lang="en-US" altLang="ja-JP" sz="1500" dirty="0">
+                <a:latin typeface="+mj-lt"/>
+              </a:rPr>
+              <a:t> </a:t>
+            </a:r>
+            <a:r>
+              <a:rPr lang="en-US" altLang="ja-JP" sz="1500" dirty="0" err="1">
+                <a:latin typeface="+mj-lt"/>
+              </a:rPr>
+              <a:t>thiết</a:t>
+            </a:r>
+            <a:r>
+              <a:rPr lang="en-US" altLang="ja-JP" sz="1500" dirty="0">
+                <a:latin typeface="+mj-lt"/>
+              </a:rPr>
+              <a:t> </a:t>
+            </a:r>
+            <a:r>
+              <a:rPr lang="en-US" altLang="ja-JP" sz="1500" dirty="0" err="1">
+                <a:latin typeface="+mj-lt"/>
+              </a:rPr>
+              <a:t>cho</a:t>
+            </a:r>
+            <a:r>
+              <a:rPr lang="en-US" altLang="ja-JP" sz="1500" dirty="0">
+                <a:latin typeface="+mj-lt"/>
+              </a:rPr>
+              <a:t> object </a:t>
+            </a:r>
+            <a:r>
+              <a:rPr lang="en-US" altLang="ja-JP" sz="1500" dirty="0" err="1">
+                <a:latin typeface="+mj-lt"/>
+              </a:rPr>
+              <a:t>của</a:t>
+            </a:r>
+            <a:r>
+              <a:rPr lang="en-US" altLang="ja-JP" sz="1500" dirty="0">
+                <a:latin typeface="+mj-lt"/>
+              </a:rPr>
+              <a:t> Sales class </a:t>
+            </a:r>
+            <a:r>
+              <a:rPr lang="en-US" altLang="ja-JP" sz="1500" dirty="0" err="1">
+                <a:latin typeface="+mj-lt"/>
+              </a:rPr>
+              <a:t>nên</a:t>
+            </a:r>
+            <a:r>
+              <a:rPr lang="en-US" altLang="ja-JP" sz="1500" dirty="0">
+                <a:latin typeface="+mj-lt"/>
+              </a:rPr>
+              <a:t> </a:t>
+            </a:r>
+            <a:r>
+              <a:rPr lang="en-US" altLang="ja-JP" sz="1500" dirty="0" err="1">
+                <a:latin typeface="+mj-lt"/>
+              </a:rPr>
+              <a:t>nếu</a:t>
+            </a:r>
+            <a:r>
+              <a:rPr lang="en-US" altLang="ja-JP" sz="1500" dirty="0">
+                <a:latin typeface="+mj-lt"/>
+              </a:rPr>
+              <a:t> là convert </a:t>
+            </a:r>
+            <a:r>
+              <a:rPr lang="en-US" altLang="ja-JP" sz="1500" dirty="0" err="1">
+                <a:latin typeface="+mj-lt"/>
+              </a:rPr>
+              <a:t>ro</a:t>
+            </a:r>
+            <a:r>
+              <a:rPr lang="en-US" altLang="ja-JP" sz="1500" dirty="0">
+                <a:latin typeface="+mj-lt"/>
+              </a:rPr>
+              <a:t>̃ </a:t>
+            </a:r>
+            <a:r>
+              <a:rPr lang="en-US" altLang="ja-JP" sz="1500" dirty="0" err="1">
+                <a:latin typeface="+mj-lt"/>
+              </a:rPr>
+              <a:t>ràng</a:t>
+            </a:r>
+            <a:r>
+              <a:rPr lang="en-US" altLang="ja-JP" sz="1500" dirty="0">
+                <a:latin typeface="+mj-lt"/>
+              </a:rPr>
+              <a:t> </a:t>
+            </a:r>
+            <a:r>
+              <a:rPr lang="en-US" altLang="ja-JP" sz="1500" dirty="0" err="1">
+                <a:latin typeface="+mj-lt"/>
+              </a:rPr>
+              <a:t>thi</a:t>
+            </a:r>
+            <a:r>
+              <a:rPr lang="en-US" altLang="ja-JP" sz="1500" dirty="0">
+                <a:latin typeface="+mj-lt"/>
+              </a:rPr>
+              <a:t>̀ có </a:t>
+            </a:r>
+            <a:r>
+              <a:rPr lang="en-US" altLang="ja-JP" sz="1500" dirty="0" err="1">
+                <a:latin typeface="+mj-lt"/>
+              </a:rPr>
+              <a:t>thê</a:t>
+            </a:r>
+            <a:r>
+              <a:rPr lang="en-US" altLang="ja-JP" sz="1500" dirty="0">
+                <a:latin typeface="+mj-lt"/>
+              </a:rPr>
+              <a:t>̉ </a:t>
+            </a:r>
+            <a:r>
+              <a:rPr lang="en-US" altLang="ja-JP" sz="1500" dirty="0" err="1">
+                <a:latin typeface="+mj-lt"/>
+              </a:rPr>
+              <a:t>thực</a:t>
+            </a:r>
+            <a:r>
+              <a:rPr lang="en-US" altLang="ja-JP" sz="1500" dirty="0">
+                <a:latin typeface="+mj-lt"/>
+              </a:rPr>
+              <a:t> </a:t>
+            </a:r>
+            <a:r>
+              <a:rPr lang="en-US" altLang="ja-JP" sz="1500" dirty="0" err="1">
+                <a:latin typeface="+mj-lt"/>
+              </a:rPr>
+              <a:t>hiện</a:t>
+            </a:r>
+            <a:r>
+              <a:rPr lang="ja-JP" altLang="en-US" sz="1500" dirty="0">
+                <a:latin typeface="+mj-lt"/>
+              </a:rPr>
               <a:t>！</a:t>
             </a:r>
-          </a:p>
-          <a:p>
-            <a:r>
-              <a:rPr lang="en-US" altLang="ja-JP" sz="1500"/>
-              <a:t>Có thể access vào thuộc tính</a:t>
-            </a:r>
-            <a:r>
-              <a:rPr lang="ja-JP" altLang="en-US" sz="1500"/>
+            <a:r>
+              <a:rPr lang="en-US" altLang="ja-JP" sz="1500" dirty="0">
+                <a:latin typeface="+mj-lt"/>
+              </a:rPr>
+              <a:t>Có </a:t>
+            </a:r>
+            <a:r>
+              <a:rPr lang="en-US" altLang="ja-JP" sz="1500" dirty="0" err="1">
+                <a:latin typeface="+mj-lt"/>
+              </a:rPr>
+              <a:t>thê</a:t>
+            </a:r>
+            <a:r>
+              <a:rPr lang="en-US" altLang="ja-JP" sz="1500" dirty="0">
+                <a:latin typeface="+mj-lt"/>
+              </a:rPr>
+              <a:t>̉ access </a:t>
+            </a:r>
+            <a:r>
+              <a:rPr lang="en-US" altLang="ja-JP" sz="1500" dirty="0" err="1">
+                <a:latin typeface="+mj-lt"/>
+              </a:rPr>
+              <a:t>vào</a:t>
+            </a:r>
+            <a:r>
+              <a:rPr lang="en-US" altLang="ja-JP" sz="1500" dirty="0">
+                <a:latin typeface="+mj-lt"/>
+              </a:rPr>
+              <a:t> </a:t>
+            </a:r>
+            <a:r>
+              <a:rPr lang="en-US" altLang="ja-JP" sz="1500" dirty="0" err="1">
+                <a:latin typeface="+mj-lt"/>
+              </a:rPr>
+              <a:t>thuộc</a:t>
+            </a:r>
+            <a:r>
+              <a:rPr lang="en-US" altLang="ja-JP" sz="1500" dirty="0">
+                <a:latin typeface="+mj-lt"/>
+              </a:rPr>
+              <a:t> </a:t>
+            </a:r>
+            <a:r>
+              <a:rPr lang="en-US" altLang="ja-JP" sz="1500" dirty="0" err="1">
+                <a:latin typeface="+mj-lt"/>
+              </a:rPr>
+              <a:t>tính</a:t>
+            </a:r>
+            <a:r>
+              <a:rPr lang="ja-JP" altLang="en-US" sz="1500" dirty="0">
+                <a:latin typeface="+mj-lt"/>
+              </a:rPr>
               <a:t>・</a:t>
             </a:r>
             <a:r>
-              <a:rPr lang="en-US" altLang="ja-JP" sz="1500"/>
-              <a:t>thao tác tùy ý mà object của Sales class có</a:t>
-            </a:r>
-            <a:r>
-              <a:rPr lang="ja-JP" altLang="en-US" sz="1500"/>
+              <a:rPr lang="en-US" altLang="ja-JP" sz="1500" dirty="0" err="1">
+                <a:latin typeface="+mj-lt"/>
+              </a:rPr>
+              <a:t>thao</a:t>
+            </a:r>
+            <a:r>
+              <a:rPr lang="en-US" altLang="ja-JP" sz="1500" dirty="0">
+                <a:latin typeface="+mj-lt"/>
+              </a:rPr>
+              <a:t> </a:t>
+            </a:r>
+            <a:r>
+              <a:rPr lang="en-US" altLang="ja-JP" sz="1500" dirty="0" err="1">
+                <a:latin typeface="+mj-lt"/>
+              </a:rPr>
+              <a:t>tác</a:t>
+            </a:r>
+            <a:r>
+              <a:rPr lang="en-US" altLang="ja-JP" sz="1500" dirty="0">
+                <a:latin typeface="+mj-lt"/>
+              </a:rPr>
+              <a:t> </a:t>
+            </a:r>
+            <a:r>
+              <a:rPr lang="en-US" altLang="ja-JP" sz="1500" dirty="0" err="1">
+                <a:latin typeface="+mj-lt"/>
+              </a:rPr>
+              <a:t>tùy</a:t>
+            </a:r>
+            <a:r>
+              <a:rPr lang="en-US" altLang="ja-JP" sz="1500" dirty="0">
+                <a:latin typeface="+mj-lt"/>
+              </a:rPr>
+              <a:t> ý mà object </a:t>
+            </a:r>
+            <a:r>
+              <a:rPr lang="en-US" altLang="ja-JP" sz="1500" dirty="0" err="1">
+                <a:latin typeface="+mj-lt"/>
+              </a:rPr>
+              <a:t>của</a:t>
+            </a:r>
+            <a:r>
+              <a:rPr lang="en-US" altLang="ja-JP" sz="1500" dirty="0">
+                <a:latin typeface="+mj-lt"/>
+              </a:rPr>
+              <a:t> Sales class có</a:t>
+            </a:r>
+            <a:r>
+              <a:rPr lang="ja-JP" altLang="en-US" sz="1500" dirty="0">
+                <a:latin typeface="+mj-lt"/>
+              </a:rPr>
               <a:t>！</a:t>
             </a:r>
           </a:p>
@@ -18802,7 +19487,7 @@
         </p:nvSpPr>
         <p:spPr bwMode="auto">
           <a:xfrm>
-            <a:off x="5702300" y="1438275"/>
+            <a:off x="6006739" y="1445419"/>
             <a:ext cx="3848100" cy="485775"/>
           </a:xfrm>
           <a:prstGeom prst="wedgeRoundRectCallout">
@@ -18842,11 +19527,135 @@
           <a:p>
             <a:pPr algn="ctr"/>
             <a:r>
-              <a:rPr lang="en-US" altLang="ja-JP" sz="1600"/>
-              <a:t>Có trường hợp có thể một cách mang tính giới hạn</a:t>
-            </a:r>
-            <a:r>
-              <a:rPr lang="ja-JP" altLang="en-US" sz="1600"/>
+              <a:rPr lang="en-US" altLang="ja-JP" sz="1600" dirty="0" err="1">
+                <a:latin typeface="+mj-lt"/>
+              </a:rPr>
+              <a:t>Có</a:t>
+            </a:r>
+            <a:r>
+              <a:rPr lang="en-US" altLang="ja-JP" sz="1600" dirty="0">
+                <a:latin typeface="+mj-lt"/>
+              </a:rPr>
+              <a:t> </a:t>
+            </a:r>
+            <a:r>
+              <a:rPr lang="en-US" altLang="ja-JP" sz="1600" dirty="0" err="1">
+                <a:latin typeface="+mj-lt"/>
+              </a:rPr>
+              <a:t>trường</a:t>
+            </a:r>
+            <a:r>
+              <a:rPr lang="en-US" altLang="ja-JP" sz="1600" dirty="0">
+                <a:latin typeface="+mj-lt"/>
+              </a:rPr>
+              <a:t> </a:t>
+            </a:r>
+            <a:r>
+              <a:rPr lang="en-US" altLang="ja-JP" sz="1600" dirty="0" err="1">
+                <a:latin typeface="+mj-lt"/>
+              </a:rPr>
+              <a:t>hợp</a:t>
+            </a:r>
+            <a:r>
+              <a:rPr lang="en-US" altLang="ja-JP" sz="1600" dirty="0">
+                <a:latin typeface="+mj-lt"/>
+              </a:rPr>
+              <a:t> </a:t>
+            </a:r>
+            <a:r>
+              <a:rPr lang="en-US" altLang="ja-JP" sz="1600" dirty="0" err="1">
+                <a:latin typeface="+mj-lt"/>
+              </a:rPr>
+              <a:t>có</a:t>
+            </a:r>
+            <a:r>
+              <a:rPr lang="en-US" altLang="ja-JP" sz="1600" dirty="0">
+                <a:latin typeface="+mj-lt"/>
+              </a:rPr>
+              <a:t> </a:t>
+            </a:r>
+            <a:r>
+              <a:rPr lang="en-US" altLang="ja-JP" sz="1600" dirty="0" err="1">
+                <a:latin typeface="+mj-lt"/>
+              </a:rPr>
+              <a:t>thể</a:t>
+            </a:r>
+            <a:r>
+              <a:rPr lang="en-US" altLang="ja-JP" sz="1600" dirty="0">
+                <a:latin typeface="+mj-lt"/>
+              </a:rPr>
+              <a:t> </a:t>
+            </a:r>
+            <a:r>
+              <a:rPr lang="en-US" altLang="ja-JP" sz="1600" dirty="0" err="1">
+                <a:latin typeface="+mj-lt"/>
+              </a:rPr>
+              <a:t>một</a:t>
+            </a:r>
+            <a:r>
+              <a:rPr lang="en-US" altLang="ja-JP" sz="1600" dirty="0">
+                <a:latin typeface="+mj-lt"/>
+              </a:rPr>
+              <a:t> </a:t>
+            </a:r>
+            <a:r>
+              <a:rPr lang="en-US" altLang="ja-JP" sz="1600" dirty="0" err="1">
+                <a:latin typeface="+mj-lt"/>
+              </a:rPr>
+              <a:t>cách</a:t>
+            </a:r>
+            <a:r>
+              <a:rPr lang="en-US" altLang="ja-JP" sz="1600" dirty="0">
+                <a:latin typeface="+mj-lt"/>
+              </a:rPr>
+              <a:t> </a:t>
+            </a:r>
+            <a:r>
+              <a:rPr lang="en-US" altLang="ja-JP" sz="1600" dirty="0" err="1">
+                <a:latin typeface="+mj-lt"/>
+              </a:rPr>
+              <a:t>mang</a:t>
+            </a:r>
+            <a:r>
+              <a:rPr lang="en-US" altLang="ja-JP" sz="1600" dirty="0">
+                <a:latin typeface="+mj-lt"/>
+              </a:rPr>
+              <a:t> </a:t>
+            </a:r>
+            <a:r>
+              <a:rPr lang="en-US" altLang="ja-JP" sz="1600" dirty="0" err="1">
+                <a:latin typeface="+mj-lt"/>
+              </a:rPr>
+              <a:t>tính</a:t>
+            </a:r>
+            <a:r>
+              <a:rPr lang="en-US" altLang="ja-JP" sz="1600" dirty="0">
+                <a:latin typeface="+mj-lt"/>
+              </a:rPr>
+              <a:t> </a:t>
+            </a:r>
+            <a:r>
+              <a:rPr lang="en-US" altLang="ja-JP" sz="1600" dirty="0" err="1">
+                <a:latin typeface="+mj-lt"/>
+              </a:rPr>
+              <a:t>giới</a:t>
+            </a:r>
+            <a:r>
+              <a:rPr lang="en-US" altLang="ja-JP" sz="1600" dirty="0">
+                <a:latin typeface="+mj-lt"/>
+              </a:rPr>
+              <a:t> </a:t>
+            </a:r>
+            <a:r>
+              <a:rPr lang="en-US" altLang="ja-JP" sz="1600" dirty="0" err="1">
+                <a:latin typeface="+mj-lt"/>
+              </a:rPr>
+              <a:t>hạn</a:t>
+            </a:r>
+            <a:r>
+              <a:rPr lang="ja-JP" altLang="en-US" sz="1600" dirty="0">
+                <a:latin typeface="+mj-lt"/>
+              </a:rPr>
               <a:t>！</a:t>
             </a:r>
           </a:p>
@@ -22634,7 +23443,7 @@
             </p:nvSpPr>
             <p:spPr bwMode="auto">
               <a:xfrm>
-                <a:off x="3796" y="1755"/>
+                <a:off x="3796" y="1968"/>
                 <a:ext cx="1029" cy="0"/>
               </a:xfrm>
               <a:prstGeom prst="line">
@@ -26968,7 +27777,7 @@
         </p:nvSpPr>
         <p:spPr bwMode="auto">
           <a:xfrm>
-            <a:off x="2971801" y="1128713"/>
+            <a:off x="3011488" y="1152525"/>
             <a:ext cx="6589712" cy="523875"/>
           </a:xfrm>
           <a:prstGeom prst="wedgeRoundRectCallout">
@@ -28284,43 +29093,85 @@
               </a:lnSpc>
             </a:pPr>
             <a:r>
-              <a:rPr lang="en-US" altLang="ja-JP" sz="1800">
+              <a:rPr lang="en-US" altLang="ja-JP" sz="1800" dirty="0">
                 <a:ea typeface="ＭＳ ゴシック" panose="020B0609070205080204" pitchFamily="49" charset="-128"/>
               </a:rPr>
               <a:t>public</a:t>
             </a:r>
             <a:r>
-              <a:rPr lang="en-US" altLang="ja-JP" sz="1800">
+              <a:rPr lang="en-US" altLang="ja-JP" sz="1800" dirty="0">
                 <a:ea typeface="MS UI Gothic" panose="020B0600070205080204" pitchFamily="50" charset="-128"/>
               </a:rPr>
               <a:t>  </a:t>
             </a:r>
             <a:r>
-              <a:rPr lang="en-US" altLang="ja-JP" sz="1800">
+              <a:rPr lang="en-US" altLang="ja-JP" sz="1800" dirty="0">
                 <a:ea typeface="ＭＳ ゴシック" panose="020B0609070205080204" pitchFamily="49" charset="-128"/>
               </a:rPr>
               <a:t>interface</a:t>
             </a:r>
             <a:r>
-              <a:rPr lang="en-US" altLang="ja-JP" sz="1800">
+              <a:rPr lang="en-US" altLang="ja-JP" sz="1800" dirty="0">
                 <a:ea typeface="MS UI Gothic" panose="020B0600070205080204" pitchFamily="50" charset="-128"/>
               </a:rPr>
-              <a:t>  interface name  </a:t>
-            </a:r>
-            <a:r>
-              <a:rPr lang="en-US" altLang="ja-JP" sz="1800">
+              <a:t>  </a:t>
+            </a:r>
+            <a:r>
+              <a:rPr lang="en-US" altLang="ja-JP" sz="1800" dirty="0" err="1">
+                <a:ea typeface="MS UI Gothic" panose="020B0600070205080204" pitchFamily="50" charset="-128"/>
+              </a:rPr>
+              <a:t>interface</a:t>
+            </a:r>
+            <a:r>
+              <a:rPr lang="en-US" altLang="ja-JP" sz="1800" dirty="0">
+                <a:ea typeface="MS UI Gothic" panose="020B0600070205080204" pitchFamily="50" charset="-128"/>
+              </a:rPr>
+              <a:t> name  </a:t>
+            </a:r>
+            <a:r>
+              <a:rPr lang="en-US" altLang="ja-JP" sz="1800" dirty="0">
                 <a:ea typeface="ＭＳ ゴシック" panose="020B0609070205080204" pitchFamily="49" charset="-128"/>
               </a:rPr>
               <a:t>extends</a:t>
             </a:r>
             <a:r>
-              <a:rPr lang="en-US" altLang="ja-JP" sz="1800">
+              <a:rPr lang="en-US" altLang="ja-JP" sz="1800" dirty="0">
                 <a:ea typeface="MS UI Gothic" panose="020B0600070205080204" pitchFamily="50" charset="-128"/>
               </a:rPr>
-              <a:t>  list interface name muốn kế thừa</a:t>
-            </a:r>
-            <a:r>
-              <a:rPr lang="en-US" altLang="ja-JP" sz="1800">
+              <a:t>  list interface name </a:t>
+            </a:r>
+            <a:r>
+              <a:rPr lang="en-US" altLang="ja-JP" sz="1800" dirty="0" err="1">
+                <a:ea typeface="MS UI Gothic" panose="020B0600070205080204" pitchFamily="50" charset="-128"/>
+              </a:rPr>
+              <a:t>muốn</a:t>
+            </a:r>
+            <a:r>
+              <a:rPr lang="en-US" altLang="ja-JP" sz="1800" dirty="0">
+                <a:ea typeface="MS UI Gothic" panose="020B0600070205080204" pitchFamily="50" charset="-128"/>
+              </a:rPr>
+              <a:t> </a:t>
+            </a:r>
+            <a:r>
+              <a:rPr lang="en-US" altLang="ja-JP" sz="1800" dirty="0" err="1">
+                <a:ea typeface="MS UI Gothic" panose="020B0600070205080204" pitchFamily="50" charset="-128"/>
+              </a:rPr>
+              <a:t>kê</a:t>
+            </a:r>
+            <a:r>
+              <a:rPr lang="en-US" altLang="ja-JP" sz="1800" dirty="0">
+                <a:ea typeface="MS UI Gothic" panose="020B0600070205080204" pitchFamily="50" charset="-128"/>
+              </a:rPr>
+              <a:t>́ </a:t>
+            </a:r>
+            <a:r>
+              <a:rPr lang="en-US" altLang="ja-JP" sz="1800" dirty="0" err="1">
+                <a:ea typeface="MS UI Gothic" panose="020B0600070205080204" pitchFamily="50" charset="-128"/>
+              </a:rPr>
+              <a:t>thừa</a:t>
+            </a:r>
+            <a:r>
+              <a:rPr lang="en-US" altLang="ja-JP" sz="1800" dirty="0">
                 <a:ea typeface="ＭＳ ゴシック" panose="020B0609070205080204" pitchFamily="49" charset="-128"/>
               </a:rPr>
               <a:t> {</a:t>
@@ -28333,22 +29184,70 @@
               </a:lnSpc>
             </a:pPr>
             <a:r>
-              <a:rPr lang="en-US" altLang="ja-JP" sz="1800">
+              <a:rPr lang="en-US" altLang="ja-JP" sz="1800" dirty="0">
                 <a:ea typeface="MS UI Gothic" panose="020B0600070205080204" pitchFamily="50" charset="-128"/>
               </a:rPr>
               <a:t>	</a:t>
             </a:r>
             <a:r>
-              <a:rPr lang="en-US" altLang="ja-JP" sz="1800">
+              <a:rPr lang="en-US" altLang="ja-JP" sz="1800" dirty="0">
                 <a:ea typeface="ＭＳ ゴシック" panose="020B0609070205080204" pitchFamily="49" charset="-128"/>
               </a:rPr>
               <a:t>//</a:t>
             </a:r>
             <a:r>
-              <a:rPr lang="en-US" altLang="ja-JP" sz="1800">
+              <a:rPr lang="en-US" altLang="ja-JP" sz="1800" dirty="0">
                 <a:ea typeface="MS UI Gothic" panose="020B0600070205080204" pitchFamily="50" charset="-128"/>
               </a:rPr>
-              <a:t>  định nghĩa hằng số</a:t>
+              <a:t>  </a:t>
+            </a:r>
+            <a:r>
+              <a:rPr lang="en-US" altLang="ja-JP" sz="1800" dirty="0" err="1">
+                <a:ea typeface="MS UI Gothic" panose="020B0600070205080204" pitchFamily="50" charset="-128"/>
+              </a:rPr>
+              <a:t>định</a:t>
+            </a:r>
+            <a:r>
+              <a:rPr lang="en-US" altLang="ja-JP" sz="1800" dirty="0">
+                <a:ea typeface="MS UI Gothic" panose="020B0600070205080204" pitchFamily="50" charset="-128"/>
+              </a:rPr>
+              <a:t> </a:t>
+            </a:r>
+            <a:r>
+              <a:rPr lang="en-US" altLang="ja-JP" sz="1800" dirty="0" err="1">
+                <a:ea typeface="MS UI Gothic" panose="020B0600070205080204" pitchFamily="50" charset="-128"/>
+              </a:rPr>
+              <a:t>nghĩa</a:t>
+            </a:r>
+            <a:r>
+              <a:rPr lang="en-US" altLang="ja-JP" sz="1800" dirty="0">
+                <a:ea typeface="MS UI Gothic" panose="020B0600070205080204" pitchFamily="50" charset="-128"/>
+              </a:rPr>
+              <a:t> </a:t>
+            </a:r>
+            <a:r>
+              <a:rPr lang="en-US" altLang="ja-JP" sz="1800" dirty="0" err="1">
+                <a:ea typeface="MS UI Gothic" panose="020B0600070205080204" pitchFamily="50" charset="-128"/>
+              </a:rPr>
+              <a:t>hằng</a:t>
+            </a:r>
+            <a:r>
+              <a:rPr lang="en-US" altLang="ja-JP" sz="1800" dirty="0">
+                <a:ea typeface="MS UI Gothic" panose="020B0600070205080204" pitchFamily="50" charset="-128"/>
+              </a:rPr>
+              <a:t> </a:t>
+            </a:r>
+            <a:r>
+              <a:rPr lang="en-US" altLang="ja-JP" sz="1800" dirty="0" err="1">
+                <a:ea typeface="MS UI Gothic" panose="020B0600070205080204" pitchFamily="50" charset="-128"/>
+              </a:rPr>
+              <a:t>sô</a:t>
+            </a:r>
+            <a:r>
+              <a:rPr lang="en-US" altLang="ja-JP" sz="1800" dirty="0">
+                <a:ea typeface="MS UI Gothic" panose="020B0600070205080204" pitchFamily="50" charset="-128"/>
+              </a:rPr>
+              <a:t>́</a:t>
             </a:r>
           </a:p>
           <a:p>
@@ -28358,16 +29257,58 @@
               </a:lnSpc>
             </a:pPr>
             <a:r>
-              <a:rPr lang="en-US" altLang="ja-JP" sz="1800">
+              <a:rPr lang="en-US" altLang="ja-JP" sz="1800" dirty="0">
                 <a:ea typeface="MS UI Gothic" panose="020B0600070205080204" pitchFamily="50" charset="-128"/>
               </a:rPr>
-              <a:t>	Kiểu data  tên biến</a:t>
-            </a:r>
-            <a:r>
-              <a:rPr lang="en-US" altLang="ja-JP" sz="1800">
+              <a:t>	</a:t>
+            </a:r>
+            <a:r>
+              <a:rPr lang="en-US" altLang="ja-JP" sz="1800" dirty="0" err="1">
+                <a:ea typeface="MS UI Gothic" panose="020B0600070205080204" pitchFamily="50" charset="-128"/>
+              </a:rPr>
+              <a:t>Kiểu</a:t>
+            </a:r>
+            <a:r>
+              <a:rPr lang="en-US" altLang="ja-JP" sz="1800" dirty="0">
+                <a:ea typeface="MS UI Gothic" panose="020B0600070205080204" pitchFamily="50" charset="-128"/>
+              </a:rPr>
+              <a:t> data  </a:t>
+            </a:r>
+            <a:r>
+              <a:rPr lang="en-US" altLang="ja-JP" sz="1800" dirty="0" err="1">
+                <a:ea typeface="MS UI Gothic" panose="020B0600070205080204" pitchFamily="50" charset="-128"/>
+              </a:rPr>
+              <a:t>tên</a:t>
+            </a:r>
+            <a:r>
+              <a:rPr lang="en-US" altLang="ja-JP" sz="1800" dirty="0">
+                <a:ea typeface="MS UI Gothic" panose="020B0600070205080204" pitchFamily="50" charset="-128"/>
+              </a:rPr>
+              <a:t> </a:t>
+            </a:r>
+            <a:r>
+              <a:rPr lang="en-US" altLang="ja-JP" sz="1800" dirty="0" err="1">
+                <a:ea typeface="MS UI Gothic" panose="020B0600070205080204" pitchFamily="50" charset="-128"/>
+              </a:rPr>
+              <a:t>biến</a:t>
+            </a:r>
+            <a:r>
+              <a:rPr lang="en-US" altLang="ja-JP" sz="1800" dirty="0">
                 <a:ea typeface="ＭＳ ゴシック" panose="020B0609070205080204" pitchFamily="49" charset="-128"/>
               </a:rPr>
-              <a:t> = giá trị;</a:t>
+              <a:t> = </a:t>
+            </a:r>
+            <a:r>
+              <a:rPr lang="en-US" altLang="ja-JP" sz="1800" dirty="0" err="1">
+                <a:ea typeface="ＭＳ ゴシック" panose="020B0609070205080204" pitchFamily="49" charset="-128"/>
+              </a:rPr>
+              <a:t>gia</a:t>
+            </a:r>
+            <a:r>
+              <a:rPr lang="en-US" altLang="ja-JP" sz="1800" dirty="0">
+                <a:ea typeface="ＭＳ ゴシック" panose="020B0609070205080204" pitchFamily="49" charset="-128"/>
+              </a:rPr>
+              <a:t>́ trị;</a:t>
             </a:r>
           </a:p>
           <a:p>
@@ -28377,13 +29318,13 @@
               </a:lnSpc>
             </a:pPr>
             <a:r>
-              <a:rPr lang="en-US" altLang="ja-JP" sz="1800">
+              <a:rPr lang="en-US" altLang="ja-JP" sz="1800" dirty="0">
                 <a:ea typeface="MS UI Gothic" panose="020B0600070205080204" pitchFamily="50" charset="-128"/>
               </a:rPr>
               <a:t>		</a:t>
             </a:r>
             <a:r>
-              <a:rPr lang="ja-JP" altLang="en-US" sz="1800">
+              <a:rPr lang="ja-JP" altLang="en-US" sz="1800" dirty="0">
                 <a:ea typeface="MS UI Gothic" panose="020B0600070205080204" pitchFamily="50" charset="-128"/>
               </a:rPr>
               <a:t>：</a:t>
@@ -28396,22 +29337,82 @@
               </a:lnSpc>
             </a:pPr>
             <a:r>
-              <a:rPr lang="ja-JP" altLang="en-US" sz="1800">
+              <a:rPr lang="ja-JP" altLang="en-US" sz="1800" dirty="0">
                 <a:ea typeface="MS UI Gothic" panose="020B0600070205080204" pitchFamily="50" charset="-128"/>
               </a:rPr>
               <a:t>	</a:t>
             </a:r>
             <a:r>
-              <a:rPr lang="en-US" altLang="ja-JP" sz="1800">
+              <a:rPr lang="en-US" altLang="ja-JP" sz="1800" dirty="0">
                 <a:ea typeface="ＭＳ ゴシック" panose="020B0609070205080204" pitchFamily="49" charset="-128"/>
               </a:rPr>
               <a:t>//</a:t>
             </a:r>
             <a:r>
-              <a:rPr lang="en-US" altLang="ja-JP" sz="1800">
+              <a:rPr lang="en-US" altLang="ja-JP" sz="1800" dirty="0">
                 <a:ea typeface="MS UI Gothic" panose="020B0600070205080204" pitchFamily="50" charset="-128"/>
               </a:rPr>
-              <a:t>  định nghĩa khuôn mẫu của method</a:t>
+              <a:t>  </a:t>
+            </a:r>
+            <a:r>
+              <a:rPr lang="en-US" altLang="ja-JP" sz="1800" dirty="0" err="1">
+                <a:ea typeface="MS UI Gothic" panose="020B0600070205080204" pitchFamily="50" charset="-128"/>
+              </a:rPr>
+              <a:t>định</a:t>
+            </a:r>
+            <a:r>
+              <a:rPr lang="en-US" altLang="ja-JP" sz="1800" dirty="0">
+                <a:ea typeface="MS UI Gothic" panose="020B0600070205080204" pitchFamily="50" charset="-128"/>
+              </a:rPr>
+              <a:t> </a:t>
+            </a:r>
+            <a:r>
+              <a:rPr lang="en-US" altLang="ja-JP" sz="1800" dirty="0" err="1">
+                <a:ea typeface="MS UI Gothic" panose="020B0600070205080204" pitchFamily="50" charset="-128"/>
+              </a:rPr>
+              <a:t>nghĩa</a:t>
+            </a:r>
+            <a:r>
+              <a:rPr lang="en-US" altLang="ja-JP" sz="1800" dirty="0">
+                <a:ea typeface="MS UI Gothic" panose="020B0600070205080204" pitchFamily="50" charset="-128"/>
+              </a:rPr>
+              <a:t> </a:t>
+            </a:r>
+            <a:r>
+              <a:rPr lang="en-US" altLang="ja-JP" sz="1800" dirty="0" err="1">
+                <a:ea typeface="MS UI Gothic" panose="020B0600070205080204" pitchFamily="50" charset="-128"/>
+              </a:rPr>
+              <a:t>khuôn</a:t>
+            </a:r>
+            <a:r>
+              <a:rPr lang="en-US" altLang="ja-JP" sz="1800" dirty="0">
+                <a:ea typeface="MS UI Gothic" panose="020B0600070205080204" pitchFamily="50" charset="-128"/>
+              </a:rPr>
+              <a:t> </a:t>
+            </a:r>
+            <a:r>
+              <a:rPr lang="en-US" altLang="ja-JP" sz="1800" dirty="0" err="1">
+                <a:ea typeface="MS UI Gothic" panose="020B0600070205080204" pitchFamily="50" charset="-128"/>
+              </a:rPr>
+              <a:t>mẫu</a:t>
+            </a:r>
+            <a:r>
+              <a:rPr lang="en-US" altLang="ja-JP" sz="1800" dirty="0">
+                <a:ea typeface="MS UI Gothic" panose="020B0600070205080204" pitchFamily="50" charset="-128"/>
+              </a:rPr>
+              <a:t> </a:t>
+            </a:r>
+            <a:r>
+              <a:rPr lang="en-US" altLang="ja-JP" sz="1800" dirty="0" err="1">
+                <a:ea typeface="MS UI Gothic" panose="020B0600070205080204" pitchFamily="50" charset="-128"/>
+              </a:rPr>
+              <a:t>của</a:t>
+            </a:r>
+            <a:r>
+              <a:rPr lang="en-US" altLang="ja-JP" sz="1800" dirty="0">
+                <a:ea typeface="MS UI Gothic" panose="020B0600070205080204" pitchFamily="50" charset="-128"/>
+              </a:rPr>
+              <a:t> method</a:t>
             </a:r>
           </a:p>
           <a:p>
@@ -28421,16 +29422,88 @@
               </a:lnSpc>
             </a:pPr>
             <a:r>
+              <a:rPr lang="en-US" altLang="ja-JP" sz="1800" dirty="0">
+                <a:ea typeface="MS UI Gothic" panose="020B0600070205080204" pitchFamily="50" charset="-128"/>
+              </a:rPr>
+              <a:t>	</a:t>
+            </a:r>
+            <a:r>
+              <a:rPr lang="en-US" altLang="ja-JP" sz="1800" dirty="0" err="1">
+                <a:ea typeface="MS UI Gothic" panose="020B0600070205080204" pitchFamily="50" charset="-128"/>
+              </a:rPr>
+              <a:t>Kiểu</a:t>
+            </a:r>
+            <a:r>
+              <a:rPr lang="en-US" altLang="ja-JP" sz="1800" dirty="0">
+                <a:ea typeface="MS UI Gothic" panose="020B0600070205080204" pitchFamily="50" charset="-128"/>
+              </a:rPr>
+              <a:t> </a:t>
+            </a:r>
+            <a:r>
+              <a:rPr lang="en-US" altLang="ja-JP" sz="1800" dirty="0" err="1">
+                <a:ea typeface="MS UI Gothic" panose="020B0600070205080204" pitchFamily="50" charset="-128"/>
+              </a:rPr>
+              <a:t>gia</a:t>
+            </a:r>
+            <a:r>
+              <a:rPr lang="en-US" altLang="ja-JP" sz="1800" dirty="0">
+                <a:ea typeface="MS UI Gothic" panose="020B0600070205080204" pitchFamily="50" charset="-128"/>
+              </a:rPr>
+              <a:t>́ trị </a:t>
+            </a:r>
+            <a:r>
+              <a:rPr lang="en-US" altLang="ja-JP" sz="1800" dirty="0" err="1">
+                <a:ea typeface="MS UI Gothic" panose="020B0600070205080204" pitchFamily="50" charset="-128"/>
+              </a:rPr>
+              <a:t>tra</a:t>
+            </a:r>
+            <a:r>
+              <a:rPr lang="en-US" altLang="ja-JP" sz="1800" dirty="0">
+                <a:ea typeface="MS UI Gothic" panose="020B0600070205080204" pitchFamily="50" charset="-128"/>
+              </a:rPr>
+              <a:t>̉ </a:t>
+            </a:r>
+            <a:r>
+              <a:rPr lang="en-US" altLang="ja-JP" sz="1800" dirty="0" err="1">
+                <a:ea typeface="MS UI Gothic" panose="020B0600070205080204" pitchFamily="50" charset="-128"/>
+              </a:rPr>
+              <a:t>vê</a:t>
+            </a:r>
+            <a:r>
               <a:rPr lang="en-US" altLang="ja-JP" sz="1800">
                 <a:ea typeface="MS UI Gothic" panose="020B0600070205080204" pitchFamily="50" charset="-128"/>
               </a:rPr>
-              <a:t>	Kiểu giá trị trả về  method name  </a:t>
+              <a:t>̀  method name  </a:t>
             </a:r>
             <a:r>
               <a:rPr lang="en-US" altLang="ja-JP" sz="1800">
                 <a:ea typeface="ＭＳ ゴシック" panose="020B0609070205080204" pitchFamily="49" charset="-128"/>
               </a:rPr>
-              <a:t>(list đối số);</a:t>
+              <a:t>(list </a:t>
+            </a:r>
+            <a:r>
+              <a:rPr lang="en-US" altLang="ja-JP" sz="1800" dirty="0" err="1">
+                <a:ea typeface="ＭＳ ゴシック" panose="020B0609070205080204" pitchFamily="49" charset="-128"/>
+              </a:rPr>
+              <a:t>đối</a:t>
+            </a:r>
+            <a:r>
+              <a:rPr lang="en-US" altLang="ja-JP" sz="1800" dirty="0">
+                <a:ea typeface="ＭＳ ゴシック" panose="020B0609070205080204" pitchFamily="49" charset="-128"/>
+              </a:rPr>
+              <a:t> </a:t>
+            </a:r>
+            <a:r>
+              <a:rPr lang="en-US" altLang="ja-JP" sz="1800" dirty="0" err="1">
+                <a:ea typeface="ＭＳ ゴシック" panose="020B0609070205080204" pitchFamily="49" charset="-128"/>
+              </a:rPr>
+              <a:t>sô</a:t>
+            </a:r>
+            <a:r>
+              <a:rPr lang="en-US" altLang="ja-JP" sz="1800" dirty="0">
+                <a:ea typeface="ＭＳ ゴシック" panose="020B0609070205080204" pitchFamily="49" charset="-128"/>
+              </a:rPr>
+              <a:t>́);</a:t>
             </a:r>
           </a:p>
           <a:p>
@@ -28440,13 +29513,13 @@
               </a:lnSpc>
             </a:pPr>
             <a:r>
-              <a:rPr lang="en-US" altLang="ja-JP" sz="1800">
+              <a:rPr lang="en-US" altLang="ja-JP" sz="1800" dirty="0">
                 <a:ea typeface="MS UI Gothic" panose="020B0600070205080204" pitchFamily="50" charset="-128"/>
               </a:rPr>
               <a:t>		</a:t>
             </a:r>
             <a:r>
-              <a:rPr lang="ja-JP" altLang="en-US" sz="1800">
+              <a:rPr lang="ja-JP" altLang="en-US" sz="1800" dirty="0">
                 <a:ea typeface="MS UI Gothic" panose="020B0600070205080204" pitchFamily="50" charset="-128"/>
               </a:rPr>
               <a:t>：</a:t>
@@ -28459,7 +29532,7 @@
               </a:lnSpc>
             </a:pPr>
             <a:r>
-              <a:rPr lang="en-US" altLang="ja-JP" sz="1800">
+              <a:rPr lang="en-US" altLang="ja-JP" sz="1800" dirty="0">
                 <a:ea typeface="ＭＳ ゴシック" panose="020B0609070205080204" pitchFamily="49" charset="-128"/>
               </a:rPr>
               <a:t>}</a:t>
@@ -28868,41 +29941,83 @@
           <a:p>
             <a:pPr lvl="1"/>
             <a:r>
-              <a:rPr lang="fr-FR" altLang="ja-JP" sz="1800" b="0">
+              <a:rPr lang="fr-FR" altLang="ja-JP" sz="1800" b="0" dirty="0">
                 <a:latin typeface="Arial" panose="020B0604020202020204" pitchFamily="34" charset="0"/>
                 <a:ea typeface="ＭＳ ゴシック" panose="020B0609070205080204" pitchFamily="49" charset="-128"/>
               </a:rPr>
               <a:t>public interface</a:t>
             </a:r>
             <a:r>
-              <a:rPr lang="fr-FR" altLang="en-US" sz="1800" b="0">
+              <a:rPr lang="fr-FR" altLang="en-US" sz="1800" b="0" dirty="0">
                 <a:latin typeface="Arial" panose="020B0604020202020204" pitchFamily="34" charset="0"/>
                 <a:ea typeface="ＭＳ ゴシック" panose="020B0609070205080204" pitchFamily="49" charset="-128"/>
               </a:rPr>
-              <a:t> PrintableInfo {</a:t>
+              <a:t> </a:t>
+            </a:r>
+            <a:r>
+              <a:rPr lang="fr-FR" altLang="en-US" sz="1800" b="0" dirty="0" err="1">
+                <a:latin typeface="Arial" panose="020B0604020202020204" pitchFamily="34" charset="0"/>
+                <a:ea typeface="ＭＳ ゴシック" panose="020B0609070205080204" pitchFamily="49" charset="-128"/>
+              </a:rPr>
+              <a:t>PrintableInfo</a:t>
+            </a:r>
+            <a:r>
+              <a:rPr lang="fr-FR" altLang="en-US" sz="1800" b="0" dirty="0">
+                <a:latin typeface="Arial" panose="020B0604020202020204" pitchFamily="34" charset="0"/>
+                <a:ea typeface="ＭＳ ゴシック" panose="020B0609070205080204" pitchFamily="49" charset="-128"/>
+              </a:rPr>
+              <a:t> {</a:t>
             </a:r>
           </a:p>
           <a:p>
             <a:pPr lvl="1"/>
             <a:r>
-              <a:rPr lang="fr-FR" altLang="ja-JP" sz="1800" b="0">
+              <a:rPr lang="fr-FR" altLang="ja-JP" sz="1800" b="0" dirty="0">
                 <a:latin typeface="Arial" panose="020B0604020202020204" pitchFamily="34" charset="0"/>
                 <a:ea typeface="ＭＳ ゴシック" panose="020B0609070205080204" pitchFamily="49" charset="-128"/>
               </a:rPr>
               <a:t>    </a:t>
             </a:r>
             <a:r>
-              <a:rPr lang="fr-FR" altLang="en-US" sz="1800" b="0">
+              <a:rPr lang="fr-FR" altLang="en-US" sz="1800" b="0" dirty="0">
                 <a:latin typeface="Arial" panose="020B0604020202020204" pitchFamily="34" charset="0"/>
                 <a:ea typeface="ＭＳ ゴシック" panose="020B0609070205080204" pitchFamily="49" charset="-128"/>
               </a:rPr>
-              <a:t>public void printInfo();</a:t>
+              <a:t>public </a:t>
+            </a:r>
+            <a:r>
+              <a:rPr lang="fr-FR" altLang="en-US" sz="1800" b="0" dirty="0" err="1">
+                <a:latin typeface="Arial" panose="020B0604020202020204" pitchFamily="34" charset="0"/>
+                <a:ea typeface="ＭＳ ゴシック" panose="020B0609070205080204" pitchFamily="49" charset="-128"/>
+              </a:rPr>
+              <a:t>void</a:t>
+            </a:r>
+            <a:r>
+              <a:rPr lang="fr-FR" altLang="en-US" sz="1800" b="0" dirty="0">
+                <a:latin typeface="Arial" panose="020B0604020202020204" pitchFamily="34" charset="0"/>
+                <a:ea typeface="ＭＳ ゴシック" panose="020B0609070205080204" pitchFamily="49" charset="-128"/>
+              </a:rPr>
+              <a:t> </a:t>
+            </a:r>
+            <a:r>
+              <a:rPr lang="fr-FR" altLang="en-US" sz="1800" b="0" dirty="0" err="1">
+                <a:latin typeface="Arial" panose="020B0604020202020204" pitchFamily="34" charset="0"/>
+                <a:ea typeface="ＭＳ ゴシック" panose="020B0609070205080204" pitchFamily="49" charset="-128"/>
+              </a:rPr>
+              <a:t>printInfo</a:t>
+            </a:r>
+            <a:r>
+              <a:rPr lang="fr-FR" altLang="en-US" sz="1800" b="0" dirty="0">
+                <a:latin typeface="Arial" panose="020B0604020202020204" pitchFamily="34" charset="0"/>
+                <a:ea typeface="ＭＳ ゴシック" panose="020B0609070205080204" pitchFamily="49" charset="-128"/>
+              </a:rPr>
+              <a:t>();</a:t>
             </a:r>
           </a:p>
           <a:p>
             <a:pPr lvl="1"/>
             <a:r>
-              <a:rPr lang="fr-FR" altLang="en-US" sz="1800" b="0">
+              <a:rPr lang="fr-FR" altLang="en-US" sz="1800" b="0" dirty="0">
                 <a:latin typeface="Arial" panose="020B0604020202020204" pitchFamily="34" charset="0"/>
                 <a:ea typeface="ＭＳ ゴシック" panose="020B0609070205080204" pitchFamily="49" charset="-128"/>
               </a:rPr>
@@ -28927,7 +30042,7 @@
         </p:nvSpPr>
         <p:spPr bwMode="auto">
           <a:xfrm>
-            <a:off x="4254500" y="2276475"/>
+            <a:off x="4458935" y="2344737"/>
             <a:ext cx="4819650" cy="508000"/>
           </a:xfrm>
           <a:prstGeom prst="wedgeRoundRectCallout">
@@ -28967,19 +30082,57 @@
           <a:p>
             <a:pPr algn="ctr"/>
             <a:r>
-              <a:rPr lang="en-US" altLang="ja-JP" sz="1800"/>
-              <a:t>toàn bộ Field sẽ là </a:t>
-            </a:r>
-            <a:r>
-              <a:rPr lang="ja-JP" altLang="en-US" sz="1800"/>
+              <a:rPr lang="en-US" altLang="ja-JP" sz="1800" dirty="0" err="1">
+                <a:latin typeface="+mj-lt"/>
+              </a:rPr>
+              <a:t>toàn</a:t>
+            </a:r>
+            <a:r>
+              <a:rPr lang="en-US" altLang="ja-JP" sz="1800" dirty="0">
+                <a:latin typeface="+mj-lt"/>
+              </a:rPr>
+              <a:t> </a:t>
+            </a:r>
+            <a:r>
+              <a:rPr lang="en-US" altLang="ja-JP" sz="1800" dirty="0" err="1">
+                <a:latin typeface="+mj-lt"/>
+              </a:rPr>
+              <a:t>bô</a:t>
+            </a:r>
+            <a:r>
+              <a:rPr lang="en-US" altLang="ja-JP" sz="1800" dirty="0">
+                <a:latin typeface="+mj-lt"/>
+              </a:rPr>
+              <a:t>̣ Field </a:t>
+            </a:r>
+            <a:r>
+              <a:rPr lang="en-US" altLang="ja-JP" sz="1800" dirty="0" err="1">
+                <a:latin typeface="+mj-lt"/>
+              </a:rPr>
+              <a:t>sẽ</a:t>
+            </a:r>
+            <a:r>
+              <a:rPr lang="en-US" altLang="ja-JP" sz="1800" dirty="0">
+                <a:latin typeface="+mj-lt"/>
+              </a:rPr>
+              <a:t> là </a:t>
+            </a:r>
+            <a:r>
+              <a:rPr lang="ja-JP" altLang="en-US" sz="1800" dirty="0">
+                <a:latin typeface="+mj-lt"/>
+              </a:rPr>
               <a:t>「</a:t>
             </a:r>
             <a:r>
-              <a:rPr lang="en-US" altLang="ja-JP" sz="1800"/>
+              <a:rPr lang="en-US" altLang="ja-JP" sz="1800" dirty="0">
+                <a:latin typeface="+mj-lt"/>
+              </a:rPr>
               <a:t>public static final </a:t>
             </a:r>
             <a:r>
-              <a:rPr lang="ja-JP" altLang="en-US" sz="1800"/>
+              <a:rPr lang="ja-JP" altLang="en-US" sz="1800" dirty="0">
+                <a:latin typeface="+mj-lt"/>
+              </a:rPr>
               <a:t>」 </a:t>
             </a:r>
           </a:p>
@@ -33712,7 +34865,7 @@
                 <a:latin typeface="+mj-lt"/>
                 <a:ea typeface="ＭＳ Ｐゴシック" panose="020B0600070205080204" pitchFamily="50" charset="-128"/>
               </a:rPr>
-              <a:t>Seles</a:t>
+              <a:t>Sales</a:t>
             </a:r>
             <a:r>
               <a:rPr lang="ja-JP" altLang="en-US" sz="2000" dirty="0">
@@ -34853,7 +36006,7 @@
         </p:nvGrpSpPr>
         <p:grpSpPr bwMode="auto">
           <a:xfrm>
-            <a:off x="52388" y="1782763"/>
+            <a:off x="61872" y="1717675"/>
             <a:ext cx="5611813" cy="3944937"/>
             <a:chOff x="33" y="1123"/>
             <a:chExt cx="3535" cy="2485"/>
@@ -35853,10 +37006,10 @@
           </p:nvGrpSpPr>
           <p:grpSpPr bwMode="auto">
             <a:xfrm>
-              <a:off x="1000" y="1736"/>
-              <a:ext cx="2078" cy="665"/>
-              <a:chOff x="1000" y="1736"/>
-              <a:chExt cx="2078" cy="665"/>
+              <a:off x="654" y="1742"/>
+              <a:ext cx="2078" cy="594"/>
+              <a:chOff x="654" y="1742"/>
+              <a:chExt cx="2078" cy="594"/>
             </a:xfrm>
           </p:grpSpPr>
           <p:grpSp>
@@ -35875,10 +37028,10 @@
             </p:nvGrpSpPr>
             <p:grpSpPr bwMode="auto">
               <a:xfrm>
-                <a:off x="1000" y="1736"/>
-                <a:ext cx="2078" cy="665"/>
-                <a:chOff x="1078" y="1736"/>
-                <a:chExt cx="2078" cy="665"/>
+                <a:off x="654" y="1742"/>
+                <a:ext cx="2078" cy="594"/>
+                <a:chOff x="732" y="1742"/>
+                <a:chExt cx="2078" cy="594"/>
               </a:xfrm>
             </p:grpSpPr>
             <p:sp>
@@ -35897,8 +37050,8 @@
               </p:nvSpPr>
               <p:spPr bwMode="auto">
                 <a:xfrm>
-                  <a:off x="1078" y="1736"/>
-                  <a:ext cx="2078" cy="665"/>
+                  <a:off x="732" y="1742"/>
+                  <a:ext cx="2078" cy="594"/>
                 </a:xfrm>
                 <a:prstGeom prst="rect">
                   <a:avLst/>
@@ -36048,7 +37201,7 @@
               </p:nvSpPr>
               <p:spPr bwMode="auto">
                 <a:xfrm>
-                  <a:off x="1310" y="2239"/>
+                  <a:off x="1421" y="2148"/>
                   <a:ext cx="743" cy="133"/>
                 </a:xfrm>
                 <a:prstGeom prst="rect">
@@ -36108,8 +37261,8 @@
               </p:nvSpPr>
               <p:spPr bwMode="auto">
                 <a:xfrm>
-                  <a:off x="1614" y="1921"/>
-                  <a:ext cx="672" cy="121"/>
+                  <a:off x="1413" y="1902"/>
+                  <a:ext cx="672" cy="157"/>
                 </a:xfrm>
                 <a:prstGeom prst="rect">
                   <a:avLst/>
@@ -38795,8 +39948,8 @@
         </p:nvSpPr>
         <p:spPr bwMode="auto">
           <a:xfrm>
-            <a:off x="7161212" y="312738"/>
-            <a:ext cx="2668588" cy="831850"/>
+            <a:off x="7161212" y="501650"/>
+            <a:ext cx="2668588" cy="642937"/>
           </a:xfrm>
           <a:prstGeom prst="wedgeRoundRectCallout">
             <a:avLst>
@@ -41823,9 +42976,9 @@
         <p:grpSpPr bwMode="auto">
           <a:xfrm>
             <a:off x="1006475" y="1790700"/>
-            <a:ext cx="8823325" cy="4975225"/>
+            <a:ext cx="8823325" cy="4686300"/>
             <a:chOff x="634" y="1128"/>
-            <a:chExt cx="5558" cy="3134"/>
+            <a:chExt cx="5558" cy="2952"/>
           </a:xfrm>
         </p:grpSpPr>
         <p:sp>
@@ -42100,9 +43253,9 @@
           <p:grpSpPr bwMode="auto">
             <a:xfrm>
               <a:off x="3792" y="2979"/>
-              <a:ext cx="2400" cy="1283"/>
+              <a:ext cx="2400" cy="1101"/>
               <a:chOff x="4518" y="6756"/>
-              <a:chExt cx="5006" cy="3207"/>
+              <a:chExt cx="5006" cy="2752"/>
             </a:xfrm>
           </p:grpSpPr>
           <p:sp>
@@ -42122,7 +43275,7 @@
             <p:spPr bwMode="auto">
               <a:xfrm>
                 <a:off x="4518" y="6756"/>
-                <a:ext cx="5006" cy="3207"/>
+                <a:ext cx="5006" cy="2752"/>
               </a:xfrm>
               <a:prstGeom prst="rect">
                 <a:avLst/>
